--- a/paper-figures/retina-figs-2.pptx
+++ b/paper-figures/retina-figs-2.pptx
@@ -5,13 +5,14 @@
     <p:sldMasterId id="2147483696" r:id="rId1"/>
   </p:sldMasterIdLst>
   <p:notesMasterIdLst>
-    <p:notesMasterId r:id="rId6"/>
+    <p:notesMasterId r:id="rId7"/>
   </p:notesMasterIdLst>
   <p:sldIdLst>
     <p:sldId id="256" r:id="rId2"/>
     <p:sldId id="257" r:id="rId3"/>
     <p:sldId id="260" r:id="rId4"/>
-    <p:sldId id="259" r:id="rId5"/>
+    <p:sldId id="261" r:id="rId5"/>
+    <p:sldId id="259" r:id="rId6"/>
   </p:sldIdLst>
   <p:sldSz cx="16002000" cy="9144000"/>
   <p:notesSz cx="6858000" cy="9144000"/>
@@ -200,7 +201,7 @@
           <a:p>
             <a:fld id="{3FC871C0-221A-49E8-B430-16ED9E6AC47C}" type="datetimeFigureOut">
               <a:rPr lang="en-US" smtClean="0"/>
-              <a:t>2/25/2026</a:t>
+              <a:t>4/21/2026</a:t>
             </a:fld>
             <a:endParaRPr lang="en-US"/>
           </a:p>
@@ -790,7 +791,7 @@
         <p:cNvPr id="1" name="">
           <a:extLst>
             <a:ext uri="{FF2B5EF4-FFF2-40B4-BE49-F238E27FC236}">
-              <a16:creationId xmlns:a16="http://schemas.microsoft.com/office/drawing/2014/main" id="{68F69920-DABD-CACC-4FCC-ACF035EA080A}"/>
+              <a16:creationId xmlns:a16="http://schemas.microsoft.com/office/drawing/2014/main" id="{29ADF1AF-84B6-2244-73B4-E2D090FF1929}"/>
             </a:ext>
           </a:extLst>
         </p:cNvPr>
@@ -810,7 +811,7 @@
           <p:cNvPr id="2" name="Slide Image Placeholder 1">
             <a:extLst>
               <a:ext uri="{FF2B5EF4-FFF2-40B4-BE49-F238E27FC236}">
-                <a16:creationId xmlns:a16="http://schemas.microsoft.com/office/drawing/2014/main" id="{AAFCCE6C-7D1B-95A7-1D7D-F461C6A6B240}"/>
+                <a16:creationId xmlns:a16="http://schemas.microsoft.com/office/drawing/2014/main" id="{AC6EA85F-BEEB-ADC3-7914-B20A667DD645}"/>
               </a:ext>
             </a:extLst>
           </p:cNvPr>
@@ -833,7 +834,7 @@
           <p:cNvPr id="3" name="Notes Placeholder 2">
             <a:extLst>
               <a:ext uri="{FF2B5EF4-FFF2-40B4-BE49-F238E27FC236}">
-                <a16:creationId xmlns:a16="http://schemas.microsoft.com/office/drawing/2014/main" id="{924944A5-9D19-9186-9F1D-CA761F31F36D}"/>
+                <a16:creationId xmlns:a16="http://schemas.microsoft.com/office/drawing/2014/main" id="{C816FDA6-3C2F-B9C1-E17F-08CBDBF59C1F}"/>
               </a:ext>
             </a:extLst>
           </p:cNvPr>
@@ -858,7 +859,7 @@
           <p:cNvPr id="4" name="Slide Number Placeholder 3">
             <a:extLst>
               <a:ext uri="{FF2B5EF4-FFF2-40B4-BE49-F238E27FC236}">
-                <a16:creationId xmlns:a16="http://schemas.microsoft.com/office/drawing/2014/main" id="{2650230E-246B-4EAF-EC7B-C7AE9EB19C5D}"/>
+                <a16:creationId xmlns:a16="http://schemas.microsoft.com/office/drawing/2014/main" id="{2F982F5A-A687-D6EB-88EE-6027F94A4F81}"/>
               </a:ext>
             </a:extLst>
           </p:cNvPr>
@@ -877,6 +878,119 @@
             <a:fld id="{BD2CD2D4-8657-4323-87EC-E08703E72665}" type="slidenum">
               <a:rPr lang="en-US" smtClean="0"/>
               <a:t>4</a:t>
+            </a:fld>
+            <a:endParaRPr lang="en-US"/>
+          </a:p>
+        </p:txBody>
+      </p:sp>
+    </p:spTree>
+    <p:extLst>
+      <p:ext uri="{BB962C8B-B14F-4D97-AF65-F5344CB8AC3E}">
+        <p14:creationId xmlns:p14="http://schemas.microsoft.com/office/powerpoint/2010/main" val="221346123"/>
+      </p:ext>
+    </p:extLst>
+  </p:cSld>
+  <p:clrMapOvr>
+    <a:masterClrMapping/>
+  </p:clrMapOvr>
+</p:notes>
+</file>
+
+<file path=ppt/notesSlides/notesSlide5.xml><?xml version="1.0" encoding="utf-8"?>
+<p:notes xmlns:a="http://schemas.openxmlformats.org/drawingml/2006/main" xmlns:r="http://schemas.openxmlformats.org/officeDocument/2006/relationships" xmlns:p="http://schemas.openxmlformats.org/presentationml/2006/main">
+  <p:cSld>
+    <p:spTree>
+      <p:nvGrpSpPr>
+        <p:cNvPr id="1" name="">
+          <a:extLst>
+            <a:ext uri="{FF2B5EF4-FFF2-40B4-BE49-F238E27FC236}">
+              <a16:creationId xmlns:a16="http://schemas.microsoft.com/office/drawing/2014/main" id="{68F69920-DABD-CACC-4FCC-ACF035EA080A}"/>
+            </a:ext>
+          </a:extLst>
+        </p:cNvPr>
+        <p:cNvGrpSpPr/>
+        <p:nvPr/>
+      </p:nvGrpSpPr>
+      <p:grpSpPr>
+        <a:xfrm>
+          <a:off x="0" y="0"/>
+          <a:ext cx="0" cy="0"/>
+          <a:chOff x="0" y="0"/>
+          <a:chExt cx="0" cy="0"/>
+        </a:xfrm>
+      </p:grpSpPr>
+      <p:sp>
+        <p:nvSpPr>
+          <p:cNvPr id="2" name="Slide Image Placeholder 1">
+            <a:extLst>
+              <a:ext uri="{FF2B5EF4-FFF2-40B4-BE49-F238E27FC236}">
+                <a16:creationId xmlns:a16="http://schemas.microsoft.com/office/drawing/2014/main" id="{AAFCCE6C-7D1B-95A7-1D7D-F461C6A6B240}"/>
+              </a:ext>
+            </a:extLst>
+          </p:cNvPr>
+          <p:cNvSpPr>
+            <a:spLocks noGrp="1" noRot="1" noChangeAspect="1"/>
+          </p:cNvSpPr>
+          <p:nvPr>
+            <p:ph type="sldImg"/>
+          </p:nvPr>
+        </p:nvSpPr>
+        <p:spPr>
+          <a:xfrm>
+            <a:off x="728663" y="1143000"/>
+            <a:ext cx="5400675" cy="3086100"/>
+          </a:xfrm>
+        </p:spPr>
+      </p:sp>
+      <p:sp>
+        <p:nvSpPr>
+          <p:cNvPr id="3" name="Notes Placeholder 2">
+            <a:extLst>
+              <a:ext uri="{FF2B5EF4-FFF2-40B4-BE49-F238E27FC236}">
+                <a16:creationId xmlns:a16="http://schemas.microsoft.com/office/drawing/2014/main" id="{924944A5-9D19-9186-9F1D-CA761F31F36D}"/>
+              </a:ext>
+            </a:extLst>
+          </p:cNvPr>
+          <p:cNvSpPr>
+            <a:spLocks noGrp="1"/>
+          </p:cNvSpPr>
+          <p:nvPr>
+            <p:ph type="body" idx="1"/>
+          </p:nvPr>
+        </p:nvSpPr>
+        <p:spPr/>
+        <p:txBody>
+          <a:bodyPr/>
+          <a:lstStyle/>
+          <a:p>
+            <a:endParaRPr lang="en-US" dirty="0"/>
+          </a:p>
+        </p:txBody>
+      </p:sp>
+      <p:sp>
+        <p:nvSpPr>
+          <p:cNvPr id="4" name="Slide Number Placeholder 3">
+            <a:extLst>
+              <a:ext uri="{FF2B5EF4-FFF2-40B4-BE49-F238E27FC236}">
+                <a16:creationId xmlns:a16="http://schemas.microsoft.com/office/drawing/2014/main" id="{2650230E-246B-4EAF-EC7B-C7AE9EB19C5D}"/>
+              </a:ext>
+            </a:extLst>
+          </p:cNvPr>
+          <p:cNvSpPr>
+            <a:spLocks noGrp="1"/>
+          </p:cNvSpPr>
+          <p:nvPr>
+            <p:ph type="sldNum" sz="quarter" idx="5"/>
+          </p:nvPr>
+        </p:nvSpPr>
+        <p:spPr/>
+        <p:txBody>
+          <a:bodyPr/>
+          <a:lstStyle/>
+          <a:p>
+            <a:fld id="{BD2CD2D4-8657-4323-87EC-E08703E72665}" type="slidenum">
+              <a:rPr lang="en-US" smtClean="0"/>
+              <a:t>5</a:t>
             </a:fld>
             <a:endParaRPr lang="en-US"/>
           </a:p>
@@ -1026,7 +1140,7 @@
           <a:p>
             <a:fld id="{7E2FD2A9-3325-4BA5-BA70-B62EDFFF97DF}" type="datetimeFigureOut">
               <a:rPr lang="en-US" smtClean="0"/>
-              <a:t>2/25/2026</a:t>
+              <a:t>4/21/2026</a:t>
             </a:fld>
             <a:endParaRPr lang="en-US"/>
           </a:p>
@@ -1196,7 +1310,7 @@
           <a:p>
             <a:fld id="{7E2FD2A9-3325-4BA5-BA70-B62EDFFF97DF}" type="datetimeFigureOut">
               <a:rPr lang="en-US" smtClean="0"/>
-              <a:t>2/25/2026</a:t>
+              <a:t>4/21/2026</a:t>
             </a:fld>
             <a:endParaRPr lang="en-US"/>
           </a:p>
@@ -1376,7 +1490,7 @@
           <a:p>
             <a:fld id="{7E2FD2A9-3325-4BA5-BA70-B62EDFFF97DF}" type="datetimeFigureOut">
               <a:rPr lang="en-US" smtClean="0"/>
-              <a:t>2/25/2026</a:t>
+              <a:t>4/21/2026</a:t>
             </a:fld>
             <a:endParaRPr lang="en-US"/>
           </a:p>
@@ -1546,7 +1660,7 @@
           <a:p>
             <a:fld id="{7E2FD2A9-3325-4BA5-BA70-B62EDFFF97DF}" type="datetimeFigureOut">
               <a:rPr lang="en-US" smtClean="0"/>
-              <a:t>2/25/2026</a:t>
+              <a:t>4/21/2026</a:t>
             </a:fld>
             <a:endParaRPr lang="en-US"/>
           </a:p>
@@ -1792,7 +1906,7 @@
           <a:p>
             <a:fld id="{7E2FD2A9-3325-4BA5-BA70-B62EDFFF97DF}" type="datetimeFigureOut">
               <a:rPr lang="en-US" smtClean="0"/>
-              <a:t>2/25/2026</a:t>
+              <a:t>4/21/2026</a:t>
             </a:fld>
             <a:endParaRPr lang="en-US"/>
           </a:p>
@@ -2024,7 +2138,7 @@
           <a:p>
             <a:fld id="{7E2FD2A9-3325-4BA5-BA70-B62EDFFF97DF}" type="datetimeFigureOut">
               <a:rPr lang="en-US" smtClean="0"/>
-              <a:t>2/25/2026</a:t>
+              <a:t>4/21/2026</a:t>
             </a:fld>
             <a:endParaRPr lang="en-US"/>
           </a:p>
@@ -2391,7 +2505,7 @@
           <a:p>
             <a:fld id="{7E2FD2A9-3325-4BA5-BA70-B62EDFFF97DF}" type="datetimeFigureOut">
               <a:rPr lang="en-US" smtClean="0"/>
-              <a:t>2/25/2026</a:t>
+              <a:t>4/21/2026</a:t>
             </a:fld>
             <a:endParaRPr lang="en-US"/>
           </a:p>
@@ -2509,7 +2623,7 @@
           <a:p>
             <a:fld id="{7E2FD2A9-3325-4BA5-BA70-B62EDFFF97DF}" type="datetimeFigureOut">
               <a:rPr lang="en-US" smtClean="0"/>
-              <a:t>2/25/2026</a:t>
+              <a:t>4/21/2026</a:t>
             </a:fld>
             <a:endParaRPr lang="en-US"/>
           </a:p>
@@ -2604,7 +2718,7 @@
           <a:p>
             <a:fld id="{7E2FD2A9-3325-4BA5-BA70-B62EDFFF97DF}" type="datetimeFigureOut">
               <a:rPr lang="en-US" smtClean="0"/>
-              <a:t>2/25/2026</a:t>
+              <a:t>4/21/2026</a:t>
             </a:fld>
             <a:endParaRPr lang="en-US"/>
           </a:p>
@@ -2881,7 +2995,7 @@
           <a:p>
             <a:fld id="{7E2FD2A9-3325-4BA5-BA70-B62EDFFF97DF}" type="datetimeFigureOut">
               <a:rPr lang="en-US" smtClean="0"/>
-              <a:t>2/25/2026</a:t>
+              <a:t>4/21/2026</a:t>
             </a:fld>
             <a:endParaRPr lang="en-US"/>
           </a:p>
@@ -3138,7 +3252,7 @@
           <a:p>
             <a:fld id="{7E2FD2A9-3325-4BA5-BA70-B62EDFFF97DF}" type="datetimeFigureOut">
               <a:rPr lang="en-US" smtClean="0"/>
-              <a:t>2/25/2026</a:t>
+              <a:t>4/21/2026</a:t>
             </a:fld>
             <a:endParaRPr lang="en-US"/>
           </a:p>
@@ -3351,7 +3465,7 @@
           <a:p>
             <a:fld id="{7E2FD2A9-3325-4BA5-BA70-B62EDFFF97DF}" type="datetimeFigureOut">
               <a:rPr lang="en-US" smtClean="0"/>
-              <a:t>2/25/2026</a:t>
+              <a:t>4/21/2026</a:t>
             </a:fld>
             <a:endParaRPr lang="en-US"/>
           </a:p>
@@ -9269,8 +9383,8 @@
           </a:ln>
         </p:spPr>
       </p:pic>
-      <mc:AlternateContent xmlns:mc="http://schemas.openxmlformats.org/markup-compatibility/2006">
-        <mc:Choice xmlns:a14="http://schemas.microsoft.com/office/drawing/2010/main" Requires="a14">
+      <mc:AlternateContent xmlns:mc="http://schemas.openxmlformats.org/markup-compatibility/2006" xmlns:a14="http://schemas.microsoft.com/office/drawing/2010/main">
+        <mc:Choice Requires="a14">
           <p:sp>
             <p:nvSpPr>
               <p:cNvPr id="29" name="TextBox 28">
@@ -9339,7 +9453,7 @@
             </p:txBody>
           </p:sp>
         </mc:Choice>
-        <mc:Fallback>
+        <mc:Fallback xmlns="">
           <p:sp>
             <p:nvSpPr>
               <p:cNvPr id="29" name="TextBox 28">
@@ -9420,8 +9534,8 @@
           </a:prstGeom>
         </p:spPr>
       </p:pic>
-      <mc:AlternateContent xmlns:mc="http://schemas.openxmlformats.org/markup-compatibility/2006">
-        <mc:Choice xmlns:a14="http://schemas.microsoft.com/office/drawing/2010/main" Requires="a14">
+      <mc:AlternateContent xmlns:mc="http://schemas.openxmlformats.org/markup-compatibility/2006" xmlns:a14="http://schemas.microsoft.com/office/drawing/2010/main">
+        <mc:Choice Requires="a14">
           <p:sp>
             <p:nvSpPr>
               <p:cNvPr id="33" name="TextBox 32">
@@ -9490,7 +9604,7 @@
             </p:txBody>
           </p:sp>
         </mc:Choice>
-        <mc:Fallback>
+        <mc:Fallback xmlns="">
           <p:sp>
             <p:nvSpPr>
               <p:cNvPr id="33" name="TextBox 32">
@@ -9749,8 +9863,8 @@
           </a:fontRef>
         </p:style>
       </p:cxnSp>
-      <mc:AlternateContent xmlns:mc="http://schemas.openxmlformats.org/markup-compatibility/2006">
-        <mc:Choice xmlns:a14="http://schemas.microsoft.com/office/drawing/2010/main" Requires="a14">
+      <mc:AlternateContent xmlns:mc="http://schemas.openxmlformats.org/markup-compatibility/2006" xmlns:a14="http://schemas.microsoft.com/office/drawing/2010/main">
+        <mc:Choice Requires="a14">
           <p:sp>
             <p:nvSpPr>
               <p:cNvPr id="46" name="TextBox 45">
@@ -9827,7 +9941,7 @@
             </p:txBody>
           </p:sp>
         </mc:Choice>
-        <mc:Fallback>
+        <mc:Fallback xmlns="">
           <p:sp>
             <p:nvSpPr>
               <p:cNvPr id="46" name="TextBox 45">
@@ -9872,8 +9986,8 @@
           </p:sp>
         </mc:Fallback>
       </mc:AlternateContent>
-      <mc:AlternateContent xmlns:mc="http://schemas.openxmlformats.org/markup-compatibility/2006">
-        <mc:Choice xmlns:a14="http://schemas.microsoft.com/office/drawing/2010/main" Requires="a14">
+      <mc:AlternateContent xmlns:mc="http://schemas.openxmlformats.org/markup-compatibility/2006" xmlns:a14="http://schemas.microsoft.com/office/drawing/2010/main">
+        <mc:Choice Requires="a14">
           <p:sp>
             <p:nvSpPr>
               <p:cNvPr id="47" name="TextBox 46">
@@ -9950,7 +10064,7 @@
             </p:txBody>
           </p:sp>
         </mc:Choice>
-        <mc:Fallback>
+        <mc:Fallback xmlns="">
           <p:sp>
             <p:nvSpPr>
               <p:cNvPr id="47" name="TextBox 46">
@@ -11881,8 +11995,8 @@
           </a:ln>
         </p:spPr>
       </p:pic>
-      <mc:AlternateContent xmlns:mc="http://schemas.openxmlformats.org/markup-compatibility/2006">
-        <mc:Choice xmlns:a14="http://schemas.microsoft.com/office/drawing/2010/main" Requires="a14">
+      <mc:AlternateContent xmlns:mc="http://schemas.openxmlformats.org/markup-compatibility/2006" xmlns:a14="http://schemas.microsoft.com/office/drawing/2010/main">
+        <mc:Choice Requires="a14">
           <p:sp>
             <p:nvSpPr>
               <p:cNvPr id="29" name="TextBox 28">
@@ -11951,7 +12065,7 @@
             </p:txBody>
           </p:sp>
         </mc:Choice>
-        <mc:Fallback>
+        <mc:Fallback xmlns="">
           <p:sp>
             <p:nvSpPr>
               <p:cNvPr id="29" name="TextBox 28">
@@ -12032,8 +12146,8 @@
           </a:prstGeom>
         </p:spPr>
       </p:pic>
-      <mc:AlternateContent xmlns:mc="http://schemas.openxmlformats.org/markup-compatibility/2006">
-        <mc:Choice xmlns:a14="http://schemas.microsoft.com/office/drawing/2010/main" Requires="a14">
+      <mc:AlternateContent xmlns:mc="http://schemas.openxmlformats.org/markup-compatibility/2006" xmlns:a14="http://schemas.microsoft.com/office/drawing/2010/main">
+        <mc:Choice Requires="a14">
           <p:sp>
             <p:nvSpPr>
               <p:cNvPr id="33" name="TextBox 32">
@@ -12102,7 +12216,7 @@
             </p:txBody>
           </p:sp>
         </mc:Choice>
-        <mc:Fallback>
+        <mc:Fallback xmlns="">
           <p:sp>
             <p:nvSpPr>
               <p:cNvPr id="33" name="TextBox 32">
@@ -12361,8 +12475,8 @@
           </a:fontRef>
         </p:style>
       </p:cxnSp>
-      <mc:AlternateContent xmlns:mc="http://schemas.openxmlformats.org/markup-compatibility/2006">
-        <mc:Choice xmlns:a14="http://schemas.microsoft.com/office/drawing/2010/main" Requires="a14">
+      <mc:AlternateContent xmlns:mc="http://schemas.openxmlformats.org/markup-compatibility/2006" xmlns:a14="http://schemas.microsoft.com/office/drawing/2010/main">
+        <mc:Choice Requires="a14">
           <p:sp>
             <p:nvSpPr>
               <p:cNvPr id="46" name="TextBox 45">
@@ -12439,7 +12553,7 @@
             </p:txBody>
           </p:sp>
         </mc:Choice>
-        <mc:Fallback>
+        <mc:Fallback xmlns="">
           <p:sp>
             <p:nvSpPr>
               <p:cNvPr id="46" name="TextBox 45">
@@ -12484,8 +12598,8 @@
           </p:sp>
         </mc:Fallback>
       </mc:AlternateContent>
-      <mc:AlternateContent xmlns:mc="http://schemas.openxmlformats.org/markup-compatibility/2006">
-        <mc:Choice xmlns:a14="http://schemas.microsoft.com/office/drawing/2010/main" Requires="a14">
+      <mc:AlternateContent xmlns:mc="http://schemas.openxmlformats.org/markup-compatibility/2006" xmlns:a14="http://schemas.microsoft.com/office/drawing/2010/main">
+        <mc:Choice Requires="a14">
           <p:sp>
             <p:nvSpPr>
               <p:cNvPr id="47" name="TextBox 46">
@@ -12562,7 +12676,7 @@
             </p:txBody>
           </p:sp>
         </mc:Choice>
-        <mc:Fallback>
+        <mc:Fallback xmlns="">
           <p:sp>
             <p:nvSpPr>
               <p:cNvPr id="47" name="TextBox 46">
@@ -13767,6 +13881,2501 @@
         <p:cNvPr id="1" name="">
           <a:extLst>
             <a:ext uri="{FF2B5EF4-FFF2-40B4-BE49-F238E27FC236}">
+              <a16:creationId xmlns:a16="http://schemas.microsoft.com/office/drawing/2014/main" id="{77DF90FA-13CB-3714-EC22-F45957CF9C53}"/>
+            </a:ext>
+          </a:extLst>
+        </p:cNvPr>
+        <p:cNvGrpSpPr/>
+        <p:nvPr/>
+      </p:nvGrpSpPr>
+      <p:grpSpPr>
+        <a:xfrm>
+          <a:off x="0" y="0"/>
+          <a:ext cx="0" cy="0"/>
+          <a:chOff x="0" y="0"/>
+          <a:chExt cx="0" cy="0"/>
+        </a:xfrm>
+      </p:grpSpPr>
+      <p:grpSp>
+        <p:nvGrpSpPr>
+          <p:cNvPr id="9" name="Group 8">
+            <a:extLst>
+              <a:ext uri="{FF2B5EF4-FFF2-40B4-BE49-F238E27FC236}">
+                <a16:creationId xmlns:a16="http://schemas.microsoft.com/office/drawing/2014/main" id="{F00EE376-8FE2-4D2A-AD51-AB6EB0C25490}"/>
+              </a:ext>
+            </a:extLst>
+          </p:cNvPr>
+          <p:cNvGrpSpPr/>
+          <p:nvPr/>
+        </p:nvGrpSpPr>
+        <p:grpSpPr>
+          <a:xfrm>
+            <a:off x="1685066" y="5845782"/>
+            <a:ext cx="9830317" cy="2370384"/>
+            <a:chOff x="1606511" y="882862"/>
+            <a:chExt cx="9830317" cy="2370384"/>
+          </a:xfrm>
+        </p:grpSpPr>
+        <p:pic>
+          <p:nvPicPr>
+            <p:cNvPr id="3" name="Picture 2" descr="A person with his hand up&#10;&#10;AI-generated content may be incorrect.">
+              <a:extLst>
+                <a:ext uri="{FF2B5EF4-FFF2-40B4-BE49-F238E27FC236}">
+                  <a16:creationId xmlns:a16="http://schemas.microsoft.com/office/drawing/2014/main" id="{D1B56869-F955-59E4-A0E9-206A1C2818CA}"/>
+                </a:ext>
+              </a:extLst>
+            </p:cNvPr>
+            <p:cNvPicPr>
+              <a:picLocks noChangeAspect="1"/>
+            </p:cNvPicPr>
+            <p:nvPr/>
+          </p:nvPicPr>
+          <p:blipFill>
+            <a:blip r:embed="rId3">
+              <a:extLst>
+                <a:ext uri="{28A0092B-C50C-407E-A947-70E740481C1C}">
+                  <a14:useLocalDpi xmlns:a14="http://schemas.microsoft.com/office/drawing/2010/main" val="0"/>
+                </a:ext>
+              </a:extLst>
+            </a:blip>
+            <a:stretch>
+              <a:fillRect/>
+            </a:stretch>
+          </p:blipFill>
+          <p:spPr>
+            <a:xfrm>
+              <a:off x="1606511" y="882862"/>
+              <a:ext cx="2503160" cy="2370384"/>
+            </a:xfrm>
+            <a:prstGeom prst="rect">
+              <a:avLst/>
+            </a:prstGeom>
+          </p:spPr>
+        </p:pic>
+        <p:sp>
+          <p:nvSpPr>
+            <p:cNvPr id="4" name="Rectangle: Rounded Corners 3">
+              <a:extLst>
+                <a:ext uri="{FF2B5EF4-FFF2-40B4-BE49-F238E27FC236}">
+                  <a16:creationId xmlns:a16="http://schemas.microsoft.com/office/drawing/2014/main" id="{C145671E-1DFB-6174-CE1E-A52FD3E0A6F4}"/>
+                </a:ext>
+              </a:extLst>
+            </p:cNvPr>
+            <p:cNvSpPr/>
+            <p:nvPr/>
+          </p:nvSpPr>
+          <p:spPr>
+            <a:xfrm>
+              <a:off x="5232948" y="1322310"/>
+              <a:ext cx="2045164" cy="1512084"/>
+            </a:xfrm>
+            <a:prstGeom prst="roundRect">
+              <a:avLst/>
+            </a:prstGeom>
+            <a:ln w="28575"/>
+            <a:effectLst>
+              <a:outerShdw blurRad="50800" dist="38100" dir="2700000" algn="tl" rotWithShape="0">
+                <a:prstClr val="black">
+                  <a:alpha val="40000"/>
+                </a:prstClr>
+              </a:outerShdw>
+            </a:effectLst>
+          </p:spPr>
+          <p:style>
+            <a:lnRef idx="1">
+              <a:schemeClr val="dk1"/>
+            </a:lnRef>
+            <a:fillRef idx="2">
+              <a:schemeClr val="dk1"/>
+            </a:fillRef>
+            <a:effectRef idx="1">
+              <a:schemeClr val="dk1"/>
+            </a:effectRef>
+            <a:fontRef idx="minor">
+              <a:schemeClr val="dk1"/>
+            </a:fontRef>
+          </p:style>
+          <p:txBody>
+            <a:bodyPr rtlCol="0" anchor="ctr"/>
+            <a:lstStyle/>
+            <a:p>
+              <a:pPr algn="ctr"/>
+              <a:endParaRPr lang="en-US" sz="1913" dirty="0"/>
+            </a:p>
+          </p:txBody>
+        </p:sp>
+        <p:cxnSp>
+          <p:nvCxnSpPr>
+            <p:cNvPr id="8" name="Straight Connector 7">
+              <a:extLst>
+                <a:ext uri="{FF2B5EF4-FFF2-40B4-BE49-F238E27FC236}">
+                  <a16:creationId xmlns:a16="http://schemas.microsoft.com/office/drawing/2014/main" id="{327625D3-4112-D753-B2B5-4A8DDAF97BEE}"/>
+                </a:ext>
+              </a:extLst>
+            </p:cNvPr>
+            <p:cNvCxnSpPr>
+              <a:cxnSpLocks/>
+            </p:cNvCxnSpPr>
+            <p:nvPr/>
+          </p:nvCxnSpPr>
+          <p:spPr>
+            <a:xfrm flipH="1" flipV="1">
+              <a:off x="4101705" y="882862"/>
+              <a:ext cx="1183209" cy="550655"/>
+            </a:xfrm>
+            <a:prstGeom prst="line">
+              <a:avLst/>
+            </a:prstGeom>
+            <a:ln w="57150">
+              <a:solidFill>
+                <a:schemeClr val="tx1"/>
+              </a:solidFill>
+            </a:ln>
+          </p:spPr>
+          <p:style>
+            <a:lnRef idx="2">
+              <a:schemeClr val="accent1"/>
+            </a:lnRef>
+            <a:fillRef idx="0">
+              <a:schemeClr val="accent1"/>
+            </a:fillRef>
+            <a:effectRef idx="1">
+              <a:schemeClr val="accent1"/>
+            </a:effectRef>
+            <a:fontRef idx="minor">
+              <a:schemeClr val="tx1"/>
+            </a:fontRef>
+          </p:style>
+        </p:cxnSp>
+        <p:cxnSp>
+          <p:nvCxnSpPr>
+            <p:cNvPr id="10" name="Straight Connector 9">
+              <a:extLst>
+                <a:ext uri="{FF2B5EF4-FFF2-40B4-BE49-F238E27FC236}">
+                  <a16:creationId xmlns:a16="http://schemas.microsoft.com/office/drawing/2014/main" id="{C8814449-10B2-25D5-6F44-4AD4478997C4}"/>
+                </a:ext>
+              </a:extLst>
+            </p:cNvPr>
+            <p:cNvCxnSpPr>
+              <a:cxnSpLocks/>
+            </p:cNvCxnSpPr>
+            <p:nvPr/>
+          </p:nvCxnSpPr>
+          <p:spPr>
+            <a:xfrm flipH="1">
+              <a:off x="4109671" y="2723183"/>
+              <a:ext cx="1175243" cy="512081"/>
+            </a:xfrm>
+            <a:prstGeom prst="line">
+              <a:avLst/>
+            </a:prstGeom>
+            <a:ln w="57150">
+              <a:solidFill>
+                <a:schemeClr val="tx1"/>
+              </a:solidFill>
+            </a:ln>
+          </p:spPr>
+          <p:style>
+            <a:lnRef idx="2">
+              <a:schemeClr val="accent1"/>
+            </a:lnRef>
+            <a:fillRef idx="0">
+              <a:schemeClr val="accent1"/>
+            </a:fillRef>
+            <a:effectRef idx="1">
+              <a:schemeClr val="accent1"/>
+            </a:effectRef>
+            <a:fontRef idx="minor">
+              <a:schemeClr val="tx1"/>
+            </a:fontRef>
+          </p:style>
+        </p:cxnSp>
+        <p:sp>
+          <p:nvSpPr>
+            <p:cNvPr id="15" name="Arrow: Right 14">
+              <a:extLst>
+                <a:ext uri="{FF2B5EF4-FFF2-40B4-BE49-F238E27FC236}">
+                  <a16:creationId xmlns:a16="http://schemas.microsoft.com/office/drawing/2014/main" id="{C91CBD01-277E-E262-7A4C-998C9EB7D077}"/>
+                </a:ext>
+              </a:extLst>
+            </p:cNvPr>
+            <p:cNvSpPr/>
+            <p:nvPr/>
+          </p:nvSpPr>
+          <p:spPr>
+            <a:xfrm>
+              <a:off x="7278112" y="1811749"/>
+              <a:ext cx="2106776" cy="533209"/>
+            </a:xfrm>
+            <a:prstGeom prst="rightArrow">
+              <a:avLst>
+                <a:gd name="adj1" fmla="val 50000"/>
+                <a:gd name="adj2" fmla="val 80597"/>
+              </a:avLst>
+            </a:prstGeom>
+            <a:ln w="28575"/>
+            <a:effectLst>
+              <a:outerShdw blurRad="50800" dist="38100" dir="2700000" algn="tl" rotWithShape="0">
+                <a:prstClr val="black">
+                  <a:alpha val="40000"/>
+                </a:prstClr>
+              </a:outerShdw>
+            </a:effectLst>
+          </p:spPr>
+          <p:style>
+            <a:lnRef idx="1">
+              <a:schemeClr val="dk1"/>
+            </a:lnRef>
+            <a:fillRef idx="2">
+              <a:schemeClr val="dk1"/>
+            </a:fillRef>
+            <a:effectRef idx="1">
+              <a:schemeClr val="dk1"/>
+            </a:effectRef>
+            <a:fontRef idx="minor">
+              <a:schemeClr val="dk1"/>
+            </a:fontRef>
+          </p:style>
+          <p:txBody>
+            <a:bodyPr rtlCol="0" anchor="ctr"/>
+            <a:lstStyle/>
+            <a:p>
+              <a:pPr algn="ctr"/>
+              <a:endParaRPr lang="en-US" sz="1913"/>
+            </a:p>
+          </p:txBody>
+        </p:sp>
+        <p:sp>
+          <p:nvSpPr>
+            <p:cNvPr id="16" name="TextBox 15">
+              <a:extLst>
+                <a:ext uri="{FF2B5EF4-FFF2-40B4-BE49-F238E27FC236}">
+                  <a16:creationId xmlns:a16="http://schemas.microsoft.com/office/drawing/2014/main" id="{4603559C-F534-0ED9-5123-4F564CBC396D}"/>
+                </a:ext>
+              </a:extLst>
+            </p:cNvPr>
+            <p:cNvSpPr txBox="1"/>
+            <p:nvPr/>
+          </p:nvSpPr>
+          <p:spPr>
+            <a:xfrm>
+              <a:off x="7772050" y="2153186"/>
+              <a:ext cx="778739" cy="386709"/>
+            </a:xfrm>
+            <a:prstGeom prst="rect">
+              <a:avLst/>
+            </a:prstGeom>
+            <a:noFill/>
+          </p:spPr>
+          <p:txBody>
+            <a:bodyPr wrap="none" rtlCol="0">
+              <a:spAutoFit/>
+            </a:bodyPr>
+            <a:lstStyle/>
+            <a:p>
+              <a:r>
+                <a:rPr lang="en-US" sz="1913" dirty="0" err="1"/>
+                <a:t>x,y,p,t</a:t>
+              </a:r>
+              <a:endParaRPr lang="en-US" sz="1913" dirty="0"/>
+            </a:p>
+          </p:txBody>
+        </p:sp>
+        <p:pic>
+          <p:nvPicPr>
+            <p:cNvPr id="18" name="Picture 17" descr="A drawing of a person's hand&#10;&#10;AI-generated content may be incorrect.">
+              <a:extLst>
+                <a:ext uri="{FF2B5EF4-FFF2-40B4-BE49-F238E27FC236}">
+                  <a16:creationId xmlns:a16="http://schemas.microsoft.com/office/drawing/2014/main" id="{81EEEDC3-32B6-7025-CD70-16AEF891AA3E}"/>
+                </a:ext>
+              </a:extLst>
+            </p:cNvPr>
+            <p:cNvPicPr>
+              <a:picLocks noChangeAspect="1"/>
+            </p:cNvPicPr>
+            <p:nvPr/>
+          </p:nvPicPr>
+          <p:blipFill>
+            <a:blip r:embed="rId4">
+              <a:extLst>
+                <a:ext uri="{28A0092B-C50C-407E-A947-70E740481C1C}">
+                  <a14:useLocalDpi xmlns:a14="http://schemas.microsoft.com/office/drawing/2010/main" val="0"/>
+                </a:ext>
+              </a:extLst>
+            </a:blip>
+            <a:stretch>
+              <a:fillRect/>
+            </a:stretch>
+          </p:blipFill>
+          <p:spPr>
+            <a:xfrm>
+              <a:off x="9384888" y="1100079"/>
+              <a:ext cx="2051940" cy="1943100"/>
+            </a:xfrm>
+            <a:prstGeom prst="rect">
+              <a:avLst/>
+            </a:prstGeom>
+            <a:ln>
+              <a:solidFill>
+                <a:schemeClr val="tx1"/>
+              </a:solidFill>
+            </a:ln>
+          </p:spPr>
+        </p:pic>
+        <p:sp>
+          <p:nvSpPr>
+            <p:cNvPr id="26" name="TextBox 25">
+              <a:extLst>
+                <a:ext uri="{FF2B5EF4-FFF2-40B4-BE49-F238E27FC236}">
+                  <a16:creationId xmlns:a16="http://schemas.microsoft.com/office/drawing/2014/main" id="{908049FF-116F-3124-614B-84DB1BD84E25}"/>
+                </a:ext>
+              </a:extLst>
+            </p:cNvPr>
+            <p:cNvSpPr txBox="1"/>
+            <p:nvPr/>
+          </p:nvSpPr>
+          <p:spPr>
+            <a:xfrm>
+              <a:off x="5625676" y="938500"/>
+              <a:ext cx="1652434" cy="386709"/>
+            </a:xfrm>
+            <a:prstGeom prst="rect">
+              <a:avLst/>
+            </a:prstGeom>
+            <a:noFill/>
+          </p:spPr>
+          <p:txBody>
+            <a:bodyPr wrap="square">
+              <a:spAutoFit/>
+            </a:bodyPr>
+            <a:lstStyle/>
+            <a:p>
+              <a:pPr algn="ctr"/>
+              <a:r>
+                <a:rPr lang="en-US" sz="1913" dirty="0"/>
+                <a:t>DVS</a:t>
+              </a:r>
+            </a:p>
+          </p:txBody>
+        </p:sp>
+      </p:grpSp>
+      <p:sp>
+        <p:nvSpPr>
+          <p:cNvPr id="64" name="Rectangle: Rounded Corners 63">
+            <a:extLst>
+              <a:ext uri="{FF2B5EF4-FFF2-40B4-BE49-F238E27FC236}">
+                <a16:creationId xmlns:a16="http://schemas.microsoft.com/office/drawing/2014/main" id="{1F5487F0-0180-92A5-2B44-1C4499FCAC83}"/>
+              </a:ext>
+            </a:extLst>
+          </p:cNvPr>
+          <p:cNvSpPr/>
+          <p:nvPr/>
+        </p:nvSpPr>
+        <p:spPr>
+          <a:xfrm>
+            <a:off x="12321807" y="3568497"/>
+            <a:ext cx="1672270" cy="1289668"/>
+          </a:xfrm>
+          <a:prstGeom prst="roundRect">
+            <a:avLst/>
+          </a:prstGeom>
+          <a:noFill/>
+          <a:ln w="9525" cap="flat" cmpd="sng" algn="ctr">
+            <a:solidFill>
+              <a:schemeClr val="accent2"/>
+            </a:solidFill>
+            <a:prstDash val="solid"/>
+            <a:round/>
+            <a:headEnd type="none" w="med" len="med"/>
+            <a:tailEnd type="none" w="med" len="med"/>
+          </a:ln>
+        </p:spPr>
+        <p:style>
+          <a:lnRef idx="0">
+            <a:scrgbClr r="0" g="0" b="0"/>
+          </a:lnRef>
+          <a:fillRef idx="0">
+            <a:scrgbClr r="0" g="0" b="0"/>
+          </a:fillRef>
+          <a:effectRef idx="0">
+            <a:scrgbClr r="0" g="0" b="0"/>
+          </a:effectRef>
+          <a:fontRef idx="minor">
+            <a:schemeClr val="accent2"/>
+          </a:fontRef>
+        </p:style>
+        <p:txBody>
+          <a:bodyPr rtlCol="0" anchor="ctr"/>
+          <a:lstStyle/>
+          <a:p>
+            <a:pPr algn="ctr"/>
+            <a:r>
+              <a:rPr lang="en-US" sz="1913" b="1" dirty="0"/>
+              <a:t>Neural Network</a:t>
+            </a:r>
+          </a:p>
+        </p:txBody>
+      </p:sp>
+      <p:sp>
+        <p:nvSpPr>
+          <p:cNvPr id="65" name="Rectangle: Rounded Corners 64">
+            <a:extLst>
+              <a:ext uri="{FF2B5EF4-FFF2-40B4-BE49-F238E27FC236}">
+                <a16:creationId xmlns:a16="http://schemas.microsoft.com/office/drawing/2014/main" id="{F5B51532-34F2-2C02-4085-64BEA5E3D68C}"/>
+              </a:ext>
+            </a:extLst>
+          </p:cNvPr>
+          <p:cNvSpPr/>
+          <p:nvPr/>
+        </p:nvSpPr>
+        <p:spPr>
+          <a:xfrm>
+            <a:off x="12330403" y="6292682"/>
+            <a:ext cx="1672270" cy="1289668"/>
+          </a:xfrm>
+          <a:prstGeom prst="roundRect">
+            <a:avLst/>
+          </a:prstGeom>
+          <a:noFill/>
+          <a:ln w="9525" cap="flat" cmpd="sng" algn="ctr">
+            <a:solidFill>
+              <a:schemeClr val="accent2"/>
+            </a:solidFill>
+            <a:prstDash val="solid"/>
+            <a:round/>
+            <a:headEnd type="none" w="med" len="med"/>
+            <a:tailEnd type="none" w="med" len="med"/>
+          </a:ln>
+        </p:spPr>
+        <p:style>
+          <a:lnRef idx="0">
+            <a:scrgbClr r="0" g="0" b="0"/>
+          </a:lnRef>
+          <a:fillRef idx="0">
+            <a:scrgbClr r="0" g="0" b="0"/>
+          </a:fillRef>
+          <a:effectRef idx="0">
+            <a:scrgbClr r="0" g="0" b="0"/>
+          </a:effectRef>
+          <a:fontRef idx="minor">
+            <a:schemeClr val="accent2"/>
+          </a:fontRef>
+        </p:style>
+        <p:txBody>
+          <a:bodyPr rtlCol="0" anchor="ctr"/>
+          <a:lstStyle/>
+          <a:p>
+            <a:pPr algn="ctr"/>
+            <a:r>
+              <a:rPr lang="en-US" sz="1913" b="1" dirty="0"/>
+              <a:t>Neural Network</a:t>
+            </a:r>
+          </a:p>
+        </p:txBody>
+      </p:sp>
+      <p:sp>
+        <p:nvSpPr>
+          <p:cNvPr id="66" name="Rectangle: Rounded Corners 65">
+            <a:extLst>
+              <a:ext uri="{FF2B5EF4-FFF2-40B4-BE49-F238E27FC236}">
+                <a16:creationId xmlns:a16="http://schemas.microsoft.com/office/drawing/2014/main" id="{BAABB544-6824-348C-CA6B-92DD7A86001C}"/>
+              </a:ext>
+            </a:extLst>
+          </p:cNvPr>
+          <p:cNvSpPr/>
+          <p:nvPr/>
+        </p:nvSpPr>
+        <p:spPr>
+          <a:xfrm>
+            <a:off x="12321806" y="5269540"/>
+            <a:ext cx="1672270" cy="662029"/>
+          </a:xfrm>
+          <a:prstGeom prst="roundRect">
+            <a:avLst/>
+          </a:prstGeom>
+          <a:noFill/>
+          <a:ln w="9525" cap="flat" cmpd="sng" algn="ctr">
+            <a:solidFill>
+              <a:schemeClr val="accent6"/>
+            </a:solidFill>
+            <a:prstDash val="solid"/>
+            <a:round/>
+            <a:headEnd type="none" w="med" len="med"/>
+            <a:tailEnd type="none" w="med" len="med"/>
+          </a:ln>
+        </p:spPr>
+        <p:style>
+          <a:lnRef idx="0">
+            <a:scrgbClr r="0" g="0" b="0"/>
+          </a:lnRef>
+          <a:fillRef idx="0">
+            <a:scrgbClr r="0" g="0" b="0"/>
+          </a:fillRef>
+          <a:effectRef idx="0">
+            <a:scrgbClr r="0" g="0" b="0"/>
+          </a:effectRef>
+          <a:fontRef idx="minor">
+            <a:schemeClr val="accent6"/>
+          </a:fontRef>
+        </p:style>
+        <p:txBody>
+          <a:bodyPr rtlCol="0" anchor="ctr"/>
+          <a:lstStyle/>
+          <a:p>
+            <a:pPr algn="ctr"/>
+            <a:r>
+              <a:rPr lang="en-US" sz="1913" b="1" dirty="0"/>
+              <a:t>Compare</a:t>
+            </a:r>
+          </a:p>
+        </p:txBody>
+      </p:sp>
+      <p:cxnSp>
+        <p:nvCxnSpPr>
+          <p:cNvPr id="70" name="Straight Arrow Connector 69">
+            <a:extLst>
+              <a:ext uri="{FF2B5EF4-FFF2-40B4-BE49-F238E27FC236}">
+                <a16:creationId xmlns:a16="http://schemas.microsoft.com/office/drawing/2014/main" id="{F4727364-22EF-EFF9-704D-0436F52FD27C}"/>
+              </a:ext>
+            </a:extLst>
+          </p:cNvPr>
+          <p:cNvCxnSpPr>
+            <a:cxnSpLocks/>
+            <a:stCxn id="64" idx="2"/>
+            <a:endCxn id="66" idx="0"/>
+          </p:cNvCxnSpPr>
+          <p:nvPr/>
+        </p:nvCxnSpPr>
+        <p:spPr>
+          <a:xfrm flipH="1">
+            <a:off x="13157943" y="4858165"/>
+            <a:ext cx="1" cy="411375"/>
+          </a:xfrm>
+          <a:prstGeom prst="straightConnector1">
+            <a:avLst/>
+          </a:prstGeom>
+          <a:ln w="57150">
+            <a:solidFill>
+              <a:schemeClr val="tx1"/>
+            </a:solidFill>
+            <a:tailEnd type="triangle"/>
+          </a:ln>
+        </p:spPr>
+        <p:style>
+          <a:lnRef idx="2">
+            <a:schemeClr val="accent1"/>
+          </a:lnRef>
+          <a:fillRef idx="0">
+            <a:schemeClr val="accent1"/>
+          </a:fillRef>
+          <a:effectRef idx="1">
+            <a:schemeClr val="accent1"/>
+          </a:effectRef>
+          <a:fontRef idx="minor">
+            <a:schemeClr val="tx1"/>
+          </a:fontRef>
+        </p:style>
+      </p:cxnSp>
+      <p:cxnSp>
+        <p:nvCxnSpPr>
+          <p:cNvPr id="72" name="Straight Arrow Connector 71">
+            <a:extLst>
+              <a:ext uri="{FF2B5EF4-FFF2-40B4-BE49-F238E27FC236}">
+                <a16:creationId xmlns:a16="http://schemas.microsoft.com/office/drawing/2014/main" id="{3AC0D75D-23D6-56C5-7E04-611E44D55DC0}"/>
+              </a:ext>
+            </a:extLst>
+          </p:cNvPr>
+          <p:cNvCxnSpPr>
+            <a:cxnSpLocks/>
+            <a:stCxn id="65" idx="0"/>
+            <a:endCxn id="66" idx="2"/>
+          </p:cNvCxnSpPr>
+          <p:nvPr/>
+        </p:nvCxnSpPr>
+        <p:spPr>
+          <a:xfrm flipH="1" flipV="1">
+            <a:off x="13157940" y="5931571"/>
+            <a:ext cx="8598" cy="361113"/>
+          </a:xfrm>
+          <a:prstGeom prst="straightConnector1">
+            <a:avLst/>
+          </a:prstGeom>
+          <a:ln w="57150">
+            <a:solidFill>
+              <a:schemeClr val="tx1"/>
+            </a:solidFill>
+            <a:tailEnd type="triangle"/>
+          </a:ln>
+        </p:spPr>
+        <p:style>
+          <a:lnRef idx="2">
+            <a:schemeClr val="accent1"/>
+          </a:lnRef>
+          <a:fillRef idx="0">
+            <a:schemeClr val="accent1"/>
+          </a:fillRef>
+          <a:effectRef idx="1">
+            <a:schemeClr val="accent1"/>
+          </a:effectRef>
+          <a:fontRef idx="minor">
+            <a:schemeClr val="tx1"/>
+          </a:fontRef>
+        </p:style>
+      </p:cxnSp>
+      <p:grpSp>
+        <p:nvGrpSpPr>
+          <p:cNvPr id="11" name="Group 10">
+            <a:extLst>
+              <a:ext uri="{FF2B5EF4-FFF2-40B4-BE49-F238E27FC236}">
+                <a16:creationId xmlns:a16="http://schemas.microsoft.com/office/drawing/2014/main" id="{5F87865E-DF59-E318-05CF-AE6CD3EFD39A}"/>
+              </a:ext>
+            </a:extLst>
+          </p:cNvPr>
+          <p:cNvGrpSpPr/>
+          <p:nvPr/>
+        </p:nvGrpSpPr>
+        <p:grpSpPr>
+          <a:xfrm>
+            <a:off x="1715654" y="2343853"/>
+            <a:ext cx="9829443" cy="3164344"/>
+            <a:chOff x="1607385" y="3085243"/>
+            <a:chExt cx="9829443" cy="3164344"/>
+          </a:xfrm>
+        </p:grpSpPr>
+        <p:sp>
+          <p:nvSpPr>
+            <p:cNvPr id="25" name="TextBox 24">
+              <a:extLst>
+                <a:ext uri="{FF2B5EF4-FFF2-40B4-BE49-F238E27FC236}">
+                  <a16:creationId xmlns:a16="http://schemas.microsoft.com/office/drawing/2014/main" id="{187993D9-D704-00EE-D23E-47D566C9A2BA}"/>
+                </a:ext>
+              </a:extLst>
+            </p:cNvPr>
+            <p:cNvSpPr txBox="1"/>
+            <p:nvPr/>
+          </p:nvSpPr>
+          <p:spPr>
+            <a:xfrm>
+              <a:off x="4925284" y="3085243"/>
+              <a:ext cx="4154170" cy="386709"/>
+            </a:xfrm>
+            <a:prstGeom prst="rect">
+              <a:avLst/>
+            </a:prstGeom>
+            <a:noFill/>
+          </p:spPr>
+          <p:txBody>
+            <a:bodyPr wrap="square">
+              <a:spAutoFit/>
+            </a:bodyPr>
+            <a:lstStyle/>
+            <a:p>
+              <a:pPr algn="ctr"/>
+              <a:r>
+                <a:rPr lang="en-US" sz="1913" dirty="0"/>
+                <a:t>Silicon Retina</a:t>
+              </a:r>
+            </a:p>
+          </p:txBody>
+        </p:sp>
+        <p:sp>
+          <p:nvSpPr>
+            <p:cNvPr id="21" name="Rectangle: Rounded Corners 20">
+              <a:extLst>
+                <a:ext uri="{FF2B5EF4-FFF2-40B4-BE49-F238E27FC236}">
+                  <a16:creationId xmlns:a16="http://schemas.microsoft.com/office/drawing/2014/main" id="{C590BC78-EC7F-1519-A0F7-7087D6BE8B65}"/>
+                </a:ext>
+              </a:extLst>
+            </p:cNvPr>
+            <p:cNvSpPr/>
+            <p:nvPr/>
+          </p:nvSpPr>
+          <p:spPr>
+            <a:xfrm>
+              <a:off x="5232948" y="3420132"/>
+              <a:ext cx="3842381" cy="2829455"/>
+            </a:xfrm>
+            <a:prstGeom prst="roundRect">
+              <a:avLst/>
+            </a:prstGeom>
+            <a:solidFill>
+              <a:srgbClr val="92D050">
+                <a:alpha val="45098"/>
+              </a:srgbClr>
+            </a:solidFill>
+            <a:ln w="28575"/>
+            <a:effectLst>
+              <a:outerShdw blurRad="50800" dist="38100" dir="2700000" algn="tl" rotWithShape="0">
+                <a:prstClr val="black">
+                  <a:alpha val="40000"/>
+                </a:prstClr>
+              </a:outerShdw>
+            </a:effectLst>
+          </p:spPr>
+          <p:style>
+            <a:lnRef idx="2">
+              <a:schemeClr val="dk1"/>
+            </a:lnRef>
+            <a:fillRef idx="1">
+              <a:schemeClr val="lt1"/>
+            </a:fillRef>
+            <a:effectRef idx="0">
+              <a:schemeClr val="dk1"/>
+            </a:effectRef>
+            <a:fontRef idx="minor">
+              <a:schemeClr val="dk1"/>
+            </a:fontRef>
+          </p:style>
+          <p:txBody>
+            <a:bodyPr rtlCol="0" anchor="ctr"/>
+            <a:lstStyle/>
+            <a:p>
+              <a:pPr algn="ctr"/>
+              <a:endParaRPr lang="en-US" sz="1913" dirty="0"/>
+            </a:p>
+          </p:txBody>
+        </p:sp>
+        <p:pic>
+          <p:nvPicPr>
+            <p:cNvPr id="28" name="Picture 27" descr="A person with their hands on their face&#10;&#10;AI-generated content may be incorrect.">
+              <a:extLst>
+                <a:ext uri="{FF2B5EF4-FFF2-40B4-BE49-F238E27FC236}">
+                  <a16:creationId xmlns:a16="http://schemas.microsoft.com/office/drawing/2014/main" id="{51457925-2A9F-57C4-7A2F-F973B9409841}"/>
+                </a:ext>
+              </a:extLst>
+            </p:cNvPr>
+            <p:cNvPicPr>
+              <a:picLocks noChangeAspect="1"/>
+            </p:cNvPicPr>
+            <p:nvPr/>
+          </p:nvPicPr>
+          <p:blipFill>
+            <a:blip r:embed="rId5">
+              <a:extLst>
+                <a:ext uri="{28A0092B-C50C-407E-A947-70E740481C1C}">
+                  <a14:useLocalDpi xmlns:a14="http://schemas.microsoft.com/office/drawing/2010/main" val="0"/>
+                </a:ext>
+              </a:extLst>
+            </a:blip>
+            <a:stretch>
+              <a:fillRect/>
+            </a:stretch>
+          </p:blipFill>
+          <p:spPr>
+            <a:xfrm>
+              <a:off x="5339132" y="4273085"/>
+              <a:ext cx="1129031" cy="1069143"/>
+            </a:xfrm>
+            <a:prstGeom prst="rect">
+              <a:avLst/>
+            </a:prstGeom>
+            <a:ln>
+              <a:solidFill>
+                <a:schemeClr val="tx1"/>
+              </a:solidFill>
+            </a:ln>
+          </p:spPr>
+        </p:pic>
+        <mc:AlternateContent xmlns:mc="http://schemas.openxmlformats.org/markup-compatibility/2006">
+          <mc:Choice xmlns:a14="http://schemas.microsoft.com/office/drawing/2010/main" Requires="a14">
+            <p:sp>
+              <p:nvSpPr>
+                <p:cNvPr id="29" name="TextBox 28">
+                  <a:extLst>
+                    <a:ext uri="{FF2B5EF4-FFF2-40B4-BE49-F238E27FC236}">
+                      <a16:creationId xmlns:a16="http://schemas.microsoft.com/office/drawing/2014/main" id="{873E6A4D-FB83-D86A-D967-5B66ED97B38C}"/>
+                    </a:ext>
+                  </a:extLst>
+                </p:cNvPr>
+                <p:cNvSpPr txBox="1"/>
+                <p:nvPr/>
+              </p:nvSpPr>
+              <p:spPr>
+                <a:xfrm>
+                  <a:off x="5599709" y="3880349"/>
+                  <a:ext cx="666208" cy="386709"/>
+                </a:xfrm>
+                <a:prstGeom prst="rect">
+                  <a:avLst/>
+                </a:prstGeom>
+                <a:noFill/>
+              </p:spPr>
+              <p:txBody>
+                <a:bodyPr wrap="none" rtlCol="0">
+                  <a:spAutoFit/>
+                </a:bodyPr>
+                <a:lstStyle/>
+                <a:p>
+                  <a:pPr/>
+                  <a14:m>
+                    <m:oMathPara xmlns:m="http://schemas.openxmlformats.org/officeDocument/2006/math">
+                      <m:oMathParaPr>
+                        <m:jc m:val="centerGroup"/>
+                      </m:oMathParaPr>
+                      <m:oMath xmlns:m="http://schemas.openxmlformats.org/officeDocument/2006/math">
+                        <m:sSub>
+                          <m:sSubPr>
+                            <m:ctrlPr>
+                              <a:rPr lang="en-US" sz="1913" i="1">
+                                <a:latin typeface="Cambria Math" panose="02040503050406030204" pitchFamily="18" charset="0"/>
+                              </a:rPr>
+                            </m:ctrlPr>
+                          </m:sSubPr>
+                          <m:e>
+                            <m:r>
+                              <a:rPr lang="en-US" sz="1913" i="1">
+                                <a:latin typeface="Cambria Math" panose="02040503050406030204" pitchFamily="18" charset="0"/>
+                              </a:rPr>
+                              <m:t>𝐼</m:t>
+                            </m:r>
+                          </m:e>
+                          <m:sub>
+                            <m:r>
+                              <a:rPr lang="en-US" sz="1913" i="1">
+                                <a:latin typeface="Cambria Math" panose="02040503050406030204" pitchFamily="18" charset="0"/>
+                              </a:rPr>
+                              <m:t>𝑂𝑃𝐿</m:t>
+                            </m:r>
+                          </m:sub>
+                        </m:sSub>
+                      </m:oMath>
+                    </m:oMathPara>
+                  </a14:m>
+                  <a:endParaRPr lang="en-US" sz="1913" dirty="0"/>
+                </a:p>
+              </p:txBody>
+            </p:sp>
+          </mc:Choice>
+          <mc:Fallback>
+            <p:sp>
+              <p:nvSpPr>
+                <p:cNvPr id="29" name="TextBox 28">
+                  <a:extLst>
+                    <a:ext uri="{FF2B5EF4-FFF2-40B4-BE49-F238E27FC236}">
+                      <a16:creationId xmlns:a16="http://schemas.microsoft.com/office/drawing/2014/main" id="{873E6A4D-FB83-D86A-D967-5B66ED97B38C}"/>
+                    </a:ext>
+                  </a:extLst>
+                </p:cNvPr>
+                <p:cNvSpPr txBox="1">
+                  <a:spLocks noRot="1" noChangeAspect="1" noMove="1" noResize="1" noEditPoints="1" noAdjustHandles="1" noChangeArrowheads="1" noChangeShapeType="1" noTextEdit="1"/>
+                </p:cNvSpPr>
+                <p:nvPr/>
+              </p:nvSpPr>
+              <p:spPr>
+                <a:xfrm>
+                  <a:off x="5599709" y="3880349"/>
+                  <a:ext cx="666208" cy="386709"/>
+                </a:xfrm>
+                <a:prstGeom prst="rect">
+                  <a:avLst/>
+                </a:prstGeom>
+                <a:blipFill>
+                  <a:blip r:embed="rId6"/>
+                  <a:stretch>
+                    <a:fillRect/>
+                  </a:stretch>
+                </a:blipFill>
+              </p:spPr>
+              <p:txBody>
+                <a:bodyPr/>
+                <a:lstStyle/>
+                <a:p>
+                  <a:r>
+                    <a:rPr lang="en-US">
+                      <a:noFill/>
+                    </a:rPr>
+                    <a:t> </a:t>
+                  </a:r>
+                </a:p>
+              </p:txBody>
+            </p:sp>
+          </mc:Fallback>
+        </mc:AlternateContent>
+        <p:pic>
+          <p:nvPicPr>
+            <p:cNvPr id="31" name="Picture 30" descr="A person taking a selfie&#10;&#10;AI-generated content may be incorrect.">
+              <a:extLst>
+                <a:ext uri="{FF2B5EF4-FFF2-40B4-BE49-F238E27FC236}">
+                  <a16:creationId xmlns:a16="http://schemas.microsoft.com/office/drawing/2014/main" id="{FBAF4462-6C78-F0E8-9E56-FFA950B4D4F1}"/>
+                </a:ext>
+              </a:extLst>
+            </p:cNvPr>
+            <p:cNvPicPr>
+              <a:picLocks noChangeAspect="1"/>
+            </p:cNvPicPr>
+            <p:nvPr/>
+          </p:nvPicPr>
+          <p:blipFill>
+            <a:blip r:embed="rId7">
+              <a:extLst>
+                <a:ext uri="{28A0092B-C50C-407E-A947-70E740481C1C}">
+                  <a14:useLocalDpi xmlns:a14="http://schemas.microsoft.com/office/drawing/2010/main" val="0"/>
+                </a:ext>
+              </a:extLst>
+            </a:blip>
+            <a:stretch>
+              <a:fillRect/>
+            </a:stretch>
+          </p:blipFill>
+          <p:spPr>
+            <a:xfrm>
+              <a:off x="6608821" y="4276624"/>
+              <a:ext cx="1129032" cy="1069144"/>
+            </a:xfrm>
+            <a:prstGeom prst="rect">
+              <a:avLst/>
+            </a:prstGeom>
+          </p:spPr>
+        </p:pic>
+        <mc:AlternateContent xmlns:mc="http://schemas.openxmlformats.org/markup-compatibility/2006">
+          <mc:Choice xmlns:a14="http://schemas.microsoft.com/office/drawing/2010/main" Requires="a14">
+            <p:sp>
+              <p:nvSpPr>
+                <p:cNvPr id="33" name="TextBox 32">
+                  <a:extLst>
+                    <a:ext uri="{FF2B5EF4-FFF2-40B4-BE49-F238E27FC236}">
+                      <a16:creationId xmlns:a16="http://schemas.microsoft.com/office/drawing/2014/main" id="{3673AA32-2C71-3060-8D8C-1B8B82A6C818}"/>
+                    </a:ext>
+                  </a:extLst>
+                </p:cNvPr>
+                <p:cNvSpPr txBox="1"/>
+                <p:nvPr/>
+              </p:nvSpPr>
+              <p:spPr>
+                <a:xfrm>
+                  <a:off x="6722949" y="3846824"/>
+                  <a:ext cx="677750" cy="386709"/>
+                </a:xfrm>
+                <a:prstGeom prst="rect">
+                  <a:avLst/>
+                </a:prstGeom>
+                <a:noFill/>
+              </p:spPr>
+              <p:txBody>
+                <a:bodyPr wrap="none" rtlCol="0">
+                  <a:spAutoFit/>
+                </a:bodyPr>
+                <a:lstStyle/>
+                <a:p>
+                  <a:pPr/>
+                  <a14:m>
+                    <m:oMathPara xmlns:m="http://schemas.openxmlformats.org/officeDocument/2006/math">
+                      <m:oMathParaPr>
+                        <m:jc m:val="centerGroup"/>
+                      </m:oMathParaPr>
+                      <m:oMath xmlns:m="http://schemas.openxmlformats.org/officeDocument/2006/math">
+                        <m:sSub>
+                          <m:sSubPr>
+                            <m:ctrlPr>
+                              <a:rPr lang="en-US" sz="1913" i="1">
+                                <a:latin typeface="Cambria Math" panose="02040503050406030204" pitchFamily="18" charset="0"/>
+                              </a:rPr>
+                            </m:ctrlPr>
+                          </m:sSubPr>
+                          <m:e>
+                            <m:r>
+                              <a:rPr lang="en-US" sz="1913" i="1">
+                                <a:latin typeface="Cambria Math" panose="02040503050406030204" pitchFamily="18" charset="0"/>
+                              </a:rPr>
+                              <m:t>𝑉</m:t>
+                            </m:r>
+                          </m:e>
+                          <m:sub>
+                            <m:r>
+                              <a:rPr lang="en-US" sz="1913" i="1">
+                                <a:latin typeface="Cambria Math" panose="02040503050406030204" pitchFamily="18" charset="0"/>
+                              </a:rPr>
+                              <m:t>𝐵𝐼𝑃</m:t>
+                            </m:r>
+                          </m:sub>
+                        </m:sSub>
+                      </m:oMath>
+                    </m:oMathPara>
+                  </a14:m>
+                  <a:endParaRPr lang="en-US" sz="1913" dirty="0"/>
+                </a:p>
+              </p:txBody>
+            </p:sp>
+          </mc:Choice>
+          <mc:Fallback>
+            <p:sp>
+              <p:nvSpPr>
+                <p:cNvPr id="33" name="TextBox 32">
+                  <a:extLst>
+                    <a:ext uri="{FF2B5EF4-FFF2-40B4-BE49-F238E27FC236}">
+                      <a16:creationId xmlns:a16="http://schemas.microsoft.com/office/drawing/2014/main" id="{3673AA32-2C71-3060-8D8C-1B8B82A6C818}"/>
+                    </a:ext>
+                  </a:extLst>
+                </p:cNvPr>
+                <p:cNvSpPr txBox="1">
+                  <a:spLocks noRot="1" noChangeAspect="1" noMove="1" noResize="1" noEditPoints="1" noAdjustHandles="1" noChangeArrowheads="1" noChangeShapeType="1" noTextEdit="1"/>
+                </p:cNvSpPr>
+                <p:nvPr/>
+              </p:nvSpPr>
+              <p:spPr>
+                <a:xfrm>
+                  <a:off x="6722949" y="3846824"/>
+                  <a:ext cx="677750" cy="386709"/>
+                </a:xfrm>
+                <a:prstGeom prst="rect">
+                  <a:avLst/>
+                </a:prstGeom>
+                <a:blipFill>
+                  <a:blip r:embed="rId8"/>
+                  <a:stretch>
+                    <a:fillRect/>
+                  </a:stretch>
+                </a:blipFill>
+              </p:spPr>
+              <p:txBody>
+                <a:bodyPr/>
+                <a:lstStyle/>
+                <a:p>
+                  <a:r>
+                    <a:rPr lang="en-US">
+                      <a:noFill/>
+                    </a:rPr>
+                    <a:t> </a:t>
+                  </a:r>
+                </a:p>
+              </p:txBody>
+            </p:sp>
+          </mc:Fallback>
+        </mc:AlternateContent>
+        <p:pic>
+          <p:nvPicPr>
+            <p:cNvPr id="35" name="Picture 34" descr="A person with glasses and a hand gesture&#10;&#10;AI-generated content may be incorrect.">
+              <a:extLst>
+                <a:ext uri="{FF2B5EF4-FFF2-40B4-BE49-F238E27FC236}">
+                  <a16:creationId xmlns:a16="http://schemas.microsoft.com/office/drawing/2014/main" id="{9F62DF14-3162-C6DF-DB7D-806E066CBA3D}"/>
+                </a:ext>
+              </a:extLst>
+            </p:cNvPr>
+            <p:cNvPicPr>
+              <a:picLocks noChangeAspect="1"/>
+            </p:cNvPicPr>
+            <p:nvPr/>
+          </p:nvPicPr>
+          <p:blipFill>
+            <a:blip r:embed="rId9">
+              <a:extLst>
+                <a:ext uri="{28A0092B-C50C-407E-A947-70E740481C1C}">
+                  <a14:useLocalDpi xmlns:a14="http://schemas.microsoft.com/office/drawing/2010/main" val="0"/>
+                </a:ext>
+              </a:extLst>
+            </a:blip>
+            <a:stretch>
+              <a:fillRect/>
+            </a:stretch>
+          </p:blipFill>
+          <p:spPr>
+            <a:xfrm>
+              <a:off x="7944155" y="3681757"/>
+              <a:ext cx="1011647" cy="957985"/>
+            </a:xfrm>
+            <a:prstGeom prst="rect">
+              <a:avLst/>
+            </a:prstGeom>
+          </p:spPr>
+        </p:pic>
+        <p:pic>
+          <p:nvPicPr>
+            <p:cNvPr id="37" name="Picture 36" descr="A person in glasses and a mask&#10;&#10;AI-generated content may be incorrect.">
+              <a:extLst>
+                <a:ext uri="{FF2B5EF4-FFF2-40B4-BE49-F238E27FC236}">
+                  <a16:creationId xmlns:a16="http://schemas.microsoft.com/office/drawing/2014/main" id="{D85043AD-27C6-43BA-9B3C-612CC1B6E669}"/>
+                </a:ext>
+              </a:extLst>
+            </p:cNvPr>
+            <p:cNvPicPr>
+              <a:picLocks noChangeAspect="1"/>
+            </p:cNvPicPr>
+            <p:nvPr/>
+          </p:nvPicPr>
+          <p:blipFill>
+            <a:blip r:embed="rId10">
+              <a:extLst>
+                <a:ext uri="{28A0092B-C50C-407E-A947-70E740481C1C}">
+                  <a14:useLocalDpi xmlns:a14="http://schemas.microsoft.com/office/drawing/2010/main" val="0"/>
+                </a:ext>
+              </a:extLst>
+            </a:blip>
+            <a:stretch>
+              <a:fillRect/>
+            </a:stretch>
+          </p:blipFill>
+          <p:spPr>
+            <a:xfrm>
+              <a:off x="7943574" y="5059469"/>
+              <a:ext cx="1011647" cy="957986"/>
+            </a:xfrm>
+            <a:prstGeom prst="rect">
+              <a:avLst/>
+            </a:prstGeom>
+          </p:spPr>
+        </p:pic>
+        <p:cxnSp>
+          <p:nvCxnSpPr>
+            <p:cNvPr id="39" name="Straight Arrow Connector 38">
+              <a:extLst>
+                <a:ext uri="{FF2B5EF4-FFF2-40B4-BE49-F238E27FC236}">
+                  <a16:creationId xmlns:a16="http://schemas.microsoft.com/office/drawing/2014/main" id="{0942B970-32BC-8C6C-16B0-0B7200DC37E3}"/>
+                </a:ext>
+              </a:extLst>
+            </p:cNvPr>
+            <p:cNvCxnSpPr>
+              <a:cxnSpLocks/>
+              <a:stCxn id="28" idx="3"/>
+              <a:endCxn id="31" idx="1"/>
+            </p:cNvCxnSpPr>
+            <p:nvPr/>
+          </p:nvCxnSpPr>
+          <p:spPr>
+            <a:xfrm>
+              <a:off x="6468159" y="4807655"/>
+              <a:ext cx="140662" cy="3540"/>
+            </a:xfrm>
+            <a:prstGeom prst="straightConnector1">
+              <a:avLst/>
+            </a:prstGeom>
+            <a:ln>
+              <a:solidFill>
+                <a:schemeClr val="tx1"/>
+              </a:solidFill>
+              <a:tailEnd type="triangle"/>
+            </a:ln>
+          </p:spPr>
+          <p:style>
+            <a:lnRef idx="2">
+              <a:schemeClr val="accent1"/>
+            </a:lnRef>
+            <a:fillRef idx="0">
+              <a:schemeClr val="accent1"/>
+            </a:fillRef>
+            <a:effectRef idx="1">
+              <a:schemeClr val="accent1"/>
+            </a:effectRef>
+            <a:fontRef idx="minor">
+              <a:schemeClr val="tx1"/>
+            </a:fontRef>
+          </p:style>
+        </p:cxnSp>
+        <p:cxnSp>
+          <p:nvCxnSpPr>
+            <p:cNvPr id="41" name="Connector: Elbow 40">
+              <a:extLst>
+                <a:ext uri="{FF2B5EF4-FFF2-40B4-BE49-F238E27FC236}">
+                  <a16:creationId xmlns:a16="http://schemas.microsoft.com/office/drawing/2014/main" id="{A151AECF-AAFF-BA27-1D6E-9AC736D8958F}"/>
+                </a:ext>
+              </a:extLst>
+            </p:cNvPr>
+            <p:cNvCxnSpPr>
+              <a:cxnSpLocks/>
+              <a:stCxn id="31" idx="3"/>
+              <a:endCxn id="35" idx="1"/>
+            </p:cNvCxnSpPr>
+            <p:nvPr/>
+          </p:nvCxnSpPr>
+          <p:spPr>
+            <a:xfrm flipV="1">
+              <a:off x="7737855" y="4160750"/>
+              <a:ext cx="206300" cy="650449"/>
+            </a:xfrm>
+            <a:prstGeom prst="bentConnector3">
+              <a:avLst>
+                <a:gd name="adj1" fmla="val 50000"/>
+              </a:avLst>
+            </a:prstGeom>
+            <a:ln>
+              <a:solidFill>
+                <a:schemeClr val="tx1"/>
+              </a:solidFill>
+              <a:tailEnd type="triangle"/>
+            </a:ln>
+          </p:spPr>
+          <p:style>
+            <a:lnRef idx="2">
+              <a:schemeClr val="accent1"/>
+            </a:lnRef>
+            <a:fillRef idx="0">
+              <a:schemeClr val="accent1"/>
+            </a:fillRef>
+            <a:effectRef idx="1">
+              <a:schemeClr val="accent1"/>
+            </a:effectRef>
+            <a:fontRef idx="minor">
+              <a:schemeClr val="tx1"/>
+            </a:fontRef>
+          </p:style>
+        </p:cxnSp>
+        <p:cxnSp>
+          <p:nvCxnSpPr>
+            <p:cNvPr id="44" name="Connector: Elbow 43">
+              <a:extLst>
+                <a:ext uri="{FF2B5EF4-FFF2-40B4-BE49-F238E27FC236}">
+                  <a16:creationId xmlns:a16="http://schemas.microsoft.com/office/drawing/2014/main" id="{7A01EF26-8B8A-F457-93A0-4324A784DD83}"/>
+                </a:ext>
+              </a:extLst>
+            </p:cNvPr>
+            <p:cNvCxnSpPr>
+              <a:cxnSpLocks/>
+              <a:stCxn id="31" idx="3"/>
+              <a:endCxn id="37" idx="1"/>
+            </p:cNvCxnSpPr>
+            <p:nvPr/>
+          </p:nvCxnSpPr>
+          <p:spPr>
+            <a:xfrm>
+              <a:off x="7737855" y="4811199"/>
+              <a:ext cx="205719" cy="727267"/>
+            </a:xfrm>
+            <a:prstGeom prst="bentConnector3">
+              <a:avLst>
+                <a:gd name="adj1" fmla="val 50000"/>
+              </a:avLst>
+            </a:prstGeom>
+            <a:ln>
+              <a:solidFill>
+                <a:schemeClr val="tx1"/>
+              </a:solidFill>
+              <a:tailEnd type="triangle"/>
+            </a:ln>
+          </p:spPr>
+          <p:style>
+            <a:lnRef idx="2">
+              <a:schemeClr val="accent1"/>
+            </a:lnRef>
+            <a:fillRef idx="0">
+              <a:schemeClr val="accent1"/>
+            </a:fillRef>
+            <a:effectRef idx="1">
+              <a:schemeClr val="accent1"/>
+            </a:effectRef>
+            <a:fontRef idx="minor">
+              <a:schemeClr val="tx1"/>
+            </a:fontRef>
+          </p:style>
+        </p:cxnSp>
+        <mc:AlternateContent xmlns:mc="http://schemas.openxmlformats.org/markup-compatibility/2006">
+          <mc:Choice xmlns:a14="http://schemas.microsoft.com/office/drawing/2010/main" Requires="a14">
+            <p:sp>
+              <p:nvSpPr>
+                <p:cNvPr id="46" name="TextBox 45">
+                  <a:extLst>
+                    <a:ext uri="{FF2B5EF4-FFF2-40B4-BE49-F238E27FC236}">
+                      <a16:creationId xmlns:a16="http://schemas.microsoft.com/office/drawing/2014/main" id="{52CF8B76-0166-17D9-E91C-CA38780F9D2A}"/>
+                    </a:ext>
+                  </a:extLst>
+                </p:cNvPr>
+                <p:cNvSpPr txBox="1"/>
+                <p:nvPr/>
+              </p:nvSpPr>
+              <p:spPr>
+                <a:xfrm>
+                  <a:off x="8106150" y="3394338"/>
+                  <a:ext cx="547073" cy="321306"/>
+                </a:xfrm>
+                <a:prstGeom prst="rect">
+                  <a:avLst/>
+                </a:prstGeom>
+                <a:noFill/>
+              </p:spPr>
+              <p:txBody>
+                <a:bodyPr wrap="none" rtlCol="0">
+                  <a:spAutoFit/>
+                </a:bodyPr>
+                <a:lstStyle/>
+                <a:p>
+                  <a:pPr/>
+                  <a14:m>
+                    <m:oMathPara xmlns:m="http://schemas.openxmlformats.org/officeDocument/2006/math">
+                      <m:oMathParaPr>
+                        <m:jc m:val="centerGroup"/>
+                      </m:oMathParaPr>
+                      <m:oMath xmlns:m="http://schemas.openxmlformats.org/officeDocument/2006/math">
+                        <m:sSubSup>
+                          <m:sSubSupPr>
+                            <m:ctrlPr>
+                              <a:rPr lang="en-US" sz="1488" i="1">
+                                <a:latin typeface="Cambria Math" panose="02040503050406030204" pitchFamily="18" charset="0"/>
+                              </a:rPr>
+                            </m:ctrlPr>
+                          </m:sSubSupPr>
+                          <m:e>
+                            <m:r>
+                              <a:rPr lang="en-US" sz="1488" i="1">
+                                <a:latin typeface="Cambria Math" panose="02040503050406030204" pitchFamily="18" charset="0"/>
+                              </a:rPr>
+                              <m:t>𝑉</m:t>
+                            </m:r>
+                          </m:e>
+                          <m:sub>
+                            <m:r>
+                              <a:rPr lang="en-US" sz="1488" i="1">
+                                <a:latin typeface="Cambria Math" panose="02040503050406030204" pitchFamily="18" charset="0"/>
+                              </a:rPr>
+                              <m:t>𝐿𝐼𝐹</m:t>
+                            </m:r>
+                          </m:sub>
+                          <m:sup>
+                            <m:r>
+                              <a:rPr lang="en-US" sz="1488" i="1">
+                                <a:latin typeface="Cambria Math" panose="02040503050406030204" pitchFamily="18" charset="0"/>
+                              </a:rPr>
+                              <m:t>+</m:t>
+                            </m:r>
+                          </m:sup>
+                        </m:sSubSup>
+                      </m:oMath>
+                    </m:oMathPara>
+                  </a14:m>
+                  <a:endParaRPr lang="en-US" sz="1488" dirty="0"/>
+                </a:p>
+              </p:txBody>
+            </p:sp>
+          </mc:Choice>
+          <mc:Fallback>
+            <p:sp>
+              <p:nvSpPr>
+                <p:cNvPr id="46" name="TextBox 45">
+                  <a:extLst>
+                    <a:ext uri="{FF2B5EF4-FFF2-40B4-BE49-F238E27FC236}">
+                      <a16:creationId xmlns:a16="http://schemas.microsoft.com/office/drawing/2014/main" id="{52CF8B76-0166-17D9-E91C-CA38780F9D2A}"/>
+                    </a:ext>
+                  </a:extLst>
+                </p:cNvPr>
+                <p:cNvSpPr txBox="1">
+                  <a:spLocks noRot="1" noChangeAspect="1" noMove="1" noResize="1" noEditPoints="1" noAdjustHandles="1" noChangeArrowheads="1" noChangeShapeType="1" noTextEdit="1"/>
+                </p:cNvSpPr>
+                <p:nvPr/>
+              </p:nvSpPr>
+              <p:spPr>
+                <a:xfrm>
+                  <a:off x="8106150" y="3394338"/>
+                  <a:ext cx="547073" cy="321306"/>
+                </a:xfrm>
+                <a:prstGeom prst="rect">
+                  <a:avLst/>
+                </a:prstGeom>
+                <a:blipFill>
+                  <a:blip r:embed="rId11"/>
+                  <a:stretch>
+                    <a:fillRect/>
+                  </a:stretch>
+                </a:blipFill>
+              </p:spPr>
+              <p:txBody>
+                <a:bodyPr/>
+                <a:lstStyle/>
+                <a:p>
+                  <a:r>
+                    <a:rPr lang="en-US">
+                      <a:noFill/>
+                    </a:rPr>
+                    <a:t> </a:t>
+                  </a:r>
+                </a:p>
+              </p:txBody>
+            </p:sp>
+          </mc:Fallback>
+        </mc:AlternateContent>
+        <mc:AlternateContent xmlns:mc="http://schemas.openxmlformats.org/markup-compatibility/2006">
+          <mc:Choice xmlns:a14="http://schemas.microsoft.com/office/drawing/2010/main" Requires="a14">
+            <p:sp>
+              <p:nvSpPr>
+                <p:cNvPr id="47" name="TextBox 46">
+                  <a:extLst>
+                    <a:ext uri="{FF2B5EF4-FFF2-40B4-BE49-F238E27FC236}">
+                      <a16:creationId xmlns:a16="http://schemas.microsoft.com/office/drawing/2014/main" id="{47A4A7FE-4039-D2F0-1A2E-DE1BEB9D5013}"/>
+                    </a:ext>
+                  </a:extLst>
+                </p:cNvPr>
+                <p:cNvSpPr txBox="1"/>
+                <p:nvPr/>
+              </p:nvSpPr>
+              <p:spPr>
+                <a:xfrm>
+                  <a:off x="8126212" y="4746720"/>
+                  <a:ext cx="547073" cy="321306"/>
+                </a:xfrm>
+                <a:prstGeom prst="rect">
+                  <a:avLst/>
+                </a:prstGeom>
+                <a:noFill/>
+              </p:spPr>
+              <p:txBody>
+                <a:bodyPr wrap="none" rtlCol="0">
+                  <a:spAutoFit/>
+                </a:bodyPr>
+                <a:lstStyle/>
+                <a:p>
+                  <a:pPr/>
+                  <a14:m>
+                    <m:oMathPara xmlns:m="http://schemas.openxmlformats.org/officeDocument/2006/math">
+                      <m:oMathParaPr>
+                        <m:jc m:val="centerGroup"/>
+                      </m:oMathParaPr>
+                      <m:oMath xmlns:m="http://schemas.openxmlformats.org/officeDocument/2006/math">
+                        <m:sSubSup>
+                          <m:sSubSupPr>
+                            <m:ctrlPr>
+                              <a:rPr lang="en-US" sz="1488" i="1">
+                                <a:latin typeface="Cambria Math" panose="02040503050406030204" pitchFamily="18" charset="0"/>
+                              </a:rPr>
+                            </m:ctrlPr>
+                          </m:sSubSupPr>
+                          <m:e>
+                            <m:r>
+                              <a:rPr lang="en-US" sz="1488" i="1">
+                                <a:latin typeface="Cambria Math" panose="02040503050406030204" pitchFamily="18" charset="0"/>
+                              </a:rPr>
+                              <m:t>𝑉</m:t>
+                            </m:r>
+                          </m:e>
+                          <m:sub>
+                            <m:r>
+                              <a:rPr lang="en-US" sz="1488" i="1">
+                                <a:latin typeface="Cambria Math" panose="02040503050406030204" pitchFamily="18" charset="0"/>
+                              </a:rPr>
+                              <m:t>𝐿𝐼𝐹</m:t>
+                            </m:r>
+                          </m:sub>
+                          <m:sup>
+                            <m:r>
+                              <a:rPr lang="en-US" sz="1488" i="1">
+                                <a:latin typeface="Cambria Math" panose="02040503050406030204" pitchFamily="18" charset="0"/>
+                              </a:rPr>
+                              <m:t>−</m:t>
+                            </m:r>
+                          </m:sup>
+                        </m:sSubSup>
+                      </m:oMath>
+                    </m:oMathPara>
+                  </a14:m>
+                  <a:endParaRPr lang="en-US" sz="1488" dirty="0"/>
+                </a:p>
+              </p:txBody>
+            </p:sp>
+          </mc:Choice>
+          <mc:Fallback>
+            <p:sp>
+              <p:nvSpPr>
+                <p:cNvPr id="47" name="TextBox 46">
+                  <a:extLst>
+                    <a:ext uri="{FF2B5EF4-FFF2-40B4-BE49-F238E27FC236}">
+                      <a16:creationId xmlns:a16="http://schemas.microsoft.com/office/drawing/2014/main" id="{47A4A7FE-4039-D2F0-1A2E-DE1BEB9D5013}"/>
+                    </a:ext>
+                  </a:extLst>
+                </p:cNvPr>
+                <p:cNvSpPr txBox="1">
+                  <a:spLocks noRot="1" noChangeAspect="1" noMove="1" noResize="1" noEditPoints="1" noAdjustHandles="1" noChangeArrowheads="1" noChangeShapeType="1" noTextEdit="1"/>
+                </p:cNvSpPr>
+                <p:nvPr/>
+              </p:nvSpPr>
+              <p:spPr>
+                <a:xfrm>
+                  <a:off x="8126212" y="4746720"/>
+                  <a:ext cx="547073" cy="321306"/>
+                </a:xfrm>
+                <a:prstGeom prst="rect">
+                  <a:avLst/>
+                </a:prstGeom>
+                <a:blipFill>
+                  <a:blip r:embed="rId12"/>
+                  <a:stretch>
+                    <a:fillRect/>
+                  </a:stretch>
+                </a:blipFill>
+              </p:spPr>
+              <p:txBody>
+                <a:bodyPr/>
+                <a:lstStyle/>
+                <a:p>
+                  <a:r>
+                    <a:rPr lang="en-US">
+                      <a:noFill/>
+                    </a:rPr>
+                    <a:t> </a:t>
+                  </a:r>
+                </a:p>
+              </p:txBody>
+            </p:sp>
+          </mc:Fallback>
+        </mc:AlternateContent>
+        <p:pic>
+          <p:nvPicPr>
+            <p:cNvPr id="49" name="Picture 48" descr="A blue and red paint on a white background&#10;&#10;AI-generated content may be incorrect.">
+              <a:extLst>
+                <a:ext uri="{FF2B5EF4-FFF2-40B4-BE49-F238E27FC236}">
+                  <a16:creationId xmlns:a16="http://schemas.microsoft.com/office/drawing/2014/main" id="{F1E81C4C-62A4-CAE8-9966-B1EE586B0EA5}"/>
+                </a:ext>
+              </a:extLst>
+            </p:cNvPr>
+            <p:cNvPicPr>
+              <a:picLocks noChangeAspect="1"/>
+            </p:cNvPicPr>
+            <p:nvPr/>
+          </p:nvPicPr>
+          <p:blipFill>
+            <a:blip r:embed="rId13">
+              <a:extLst>
+                <a:ext uri="{28A0092B-C50C-407E-A947-70E740481C1C}">
+                  <a14:useLocalDpi xmlns:a14="http://schemas.microsoft.com/office/drawing/2010/main" val="0"/>
+                </a:ext>
+              </a:extLst>
+            </a:blip>
+            <a:stretch>
+              <a:fillRect/>
+            </a:stretch>
+          </p:blipFill>
+          <p:spPr>
+            <a:xfrm>
+              <a:off x="9384888" y="3834163"/>
+              <a:ext cx="2051940" cy="1943100"/>
+            </a:xfrm>
+            <a:prstGeom prst="rect">
+              <a:avLst/>
+            </a:prstGeom>
+            <a:ln>
+              <a:solidFill>
+                <a:schemeClr val="tx1"/>
+              </a:solidFill>
+            </a:ln>
+          </p:spPr>
+        </p:pic>
+        <p:sp>
+          <p:nvSpPr>
+            <p:cNvPr id="59" name="Arrow: Right 58">
+              <a:extLst>
+                <a:ext uri="{FF2B5EF4-FFF2-40B4-BE49-F238E27FC236}">
+                  <a16:creationId xmlns:a16="http://schemas.microsoft.com/office/drawing/2014/main" id="{B4B9BB6A-5FAA-50CA-729B-BF8389A6230A}"/>
+                </a:ext>
+              </a:extLst>
+            </p:cNvPr>
+            <p:cNvSpPr/>
+            <p:nvPr/>
+          </p:nvSpPr>
+          <p:spPr>
+            <a:xfrm>
+              <a:off x="9074386" y="4732082"/>
+              <a:ext cx="295259" cy="195018"/>
+            </a:xfrm>
+            <a:prstGeom prst="rightArrow">
+              <a:avLst/>
+            </a:prstGeom>
+          </p:spPr>
+          <p:style>
+            <a:lnRef idx="2">
+              <a:schemeClr val="accent6">
+                <a:shade val="15000"/>
+              </a:schemeClr>
+            </a:lnRef>
+            <a:fillRef idx="1">
+              <a:schemeClr val="accent6"/>
+            </a:fillRef>
+            <a:effectRef idx="0">
+              <a:schemeClr val="accent6"/>
+            </a:effectRef>
+            <a:fontRef idx="minor">
+              <a:schemeClr val="lt1"/>
+            </a:fontRef>
+          </p:style>
+          <p:txBody>
+            <a:bodyPr rtlCol="0" anchor="ctr"/>
+            <a:lstStyle/>
+            <a:p>
+              <a:pPr algn="ctr"/>
+              <a:endParaRPr lang="en-US" sz="1913" dirty="0"/>
+            </a:p>
+          </p:txBody>
+        </p:sp>
+        <p:pic>
+          <p:nvPicPr>
+            <p:cNvPr id="97" name="Picture 96" descr="A person with his hand up&#10;&#10;AI-generated content may be incorrect.">
+              <a:extLst>
+                <a:ext uri="{FF2B5EF4-FFF2-40B4-BE49-F238E27FC236}">
+                  <a16:creationId xmlns:a16="http://schemas.microsoft.com/office/drawing/2014/main" id="{38678E6A-7C62-E443-95BE-8F3917993635}"/>
+                </a:ext>
+              </a:extLst>
+            </p:cNvPr>
+            <p:cNvPicPr>
+              <a:picLocks noChangeAspect="1"/>
+            </p:cNvPicPr>
+            <p:nvPr/>
+          </p:nvPicPr>
+          <p:blipFill>
+            <a:blip r:embed="rId3">
+              <a:extLst>
+                <a:ext uri="{28A0092B-C50C-407E-A947-70E740481C1C}">
+                  <a14:useLocalDpi xmlns:a14="http://schemas.microsoft.com/office/drawing/2010/main" val="0"/>
+                </a:ext>
+              </a:extLst>
+            </a:blip>
+            <a:stretch>
+              <a:fillRect/>
+            </a:stretch>
+          </p:blipFill>
+          <p:spPr>
+            <a:xfrm>
+              <a:off x="1607385" y="3653018"/>
+              <a:ext cx="2503160" cy="2370384"/>
+            </a:xfrm>
+            <a:prstGeom prst="rect">
+              <a:avLst/>
+            </a:prstGeom>
+          </p:spPr>
+        </p:pic>
+        <p:cxnSp>
+          <p:nvCxnSpPr>
+            <p:cNvPr id="115" name="Straight Connector 114">
+              <a:extLst>
+                <a:ext uri="{FF2B5EF4-FFF2-40B4-BE49-F238E27FC236}">
+                  <a16:creationId xmlns:a16="http://schemas.microsoft.com/office/drawing/2014/main" id="{B5FC8C0D-37D9-0C92-B722-C9F3F32751D2}"/>
+                </a:ext>
+              </a:extLst>
+            </p:cNvPr>
+            <p:cNvCxnSpPr>
+              <a:cxnSpLocks/>
+            </p:cNvCxnSpPr>
+            <p:nvPr/>
+          </p:nvCxnSpPr>
+          <p:spPr>
+            <a:xfrm flipH="1" flipV="1">
+              <a:off x="4110544" y="3653021"/>
+              <a:ext cx="1143247" cy="559216"/>
+            </a:xfrm>
+            <a:prstGeom prst="line">
+              <a:avLst/>
+            </a:prstGeom>
+            <a:ln w="57150">
+              <a:solidFill>
+                <a:schemeClr val="tx1"/>
+              </a:solidFill>
+            </a:ln>
+          </p:spPr>
+          <p:style>
+            <a:lnRef idx="2">
+              <a:schemeClr val="accent1"/>
+            </a:lnRef>
+            <a:fillRef idx="0">
+              <a:schemeClr val="accent1"/>
+            </a:fillRef>
+            <a:effectRef idx="1">
+              <a:schemeClr val="accent1"/>
+            </a:effectRef>
+            <a:fontRef idx="minor">
+              <a:schemeClr val="tx1"/>
+            </a:fontRef>
+          </p:style>
+        </p:cxnSp>
+        <p:cxnSp>
+          <p:nvCxnSpPr>
+            <p:cNvPr id="117" name="Straight Connector 116">
+              <a:extLst>
+                <a:ext uri="{FF2B5EF4-FFF2-40B4-BE49-F238E27FC236}">
+                  <a16:creationId xmlns:a16="http://schemas.microsoft.com/office/drawing/2014/main" id="{7C41939A-1B60-E249-3DF2-63D65428E12B}"/>
+                </a:ext>
+              </a:extLst>
+            </p:cNvPr>
+            <p:cNvCxnSpPr>
+              <a:cxnSpLocks/>
+            </p:cNvCxnSpPr>
+            <p:nvPr/>
+          </p:nvCxnSpPr>
+          <p:spPr>
+            <a:xfrm flipH="1">
+              <a:off x="4093738" y="5447370"/>
+              <a:ext cx="1135085" cy="565989"/>
+            </a:xfrm>
+            <a:prstGeom prst="line">
+              <a:avLst/>
+            </a:prstGeom>
+            <a:ln w="57150">
+              <a:solidFill>
+                <a:schemeClr val="tx1"/>
+              </a:solidFill>
+            </a:ln>
+          </p:spPr>
+          <p:style>
+            <a:lnRef idx="2">
+              <a:schemeClr val="accent1"/>
+            </a:lnRef>
+            <a:fillRef idx="0">
+              <a:schemeClr val="accent1"/>
+            </a:fillRef>
+            <a:effectRef idx="1">
+              <a:schemeClr val="accent1"/>
+            </a:effectRef>
+            <a:fontRef idx="minor">
+              <a:schemeClr val="tx1"/>
+            </a:fontRef>
+          </p:style>
+        </p:cxnSp>
+      </p:grpSp>
+      <p:sp>
+        <p:nvSpPr>
+          <p:cNvPr id="45" name="Rectangle: Rounded Corners 44">
+            <a:extLst>
+              <a:ext uri="{FF2B5EF4-FFF2-40B4-BE49-F238E27FC236}">
+                <a16:creationId xmlns:a16="http://schemas.microsoft.com/office/drawing/2014/main" id="{52B829B4-840D-F33B-51C9-ECF2546D4E61}"/>
+              </a:ext>
+            </a:extLst>
+          </p:cNvPr>
+          <p:cNvSpPr/>
+          <p:nvPr/>
+        </p:nvSpPr>
+        <p:spPr>
+          <a:xfrm>
+            <a:off x="9514752" y="849353"/>
+            <a:ext cx="4516162" cy="1854903"/>
+          </a:xfrm>
+          <a:prstGeom prst="roundRect">
+            <a:avLst/>
+          </a:prstGeom>
+          <a:noFill/>
+          <a:ln w="38100">
+            <a:solidFill>
+              <a:schemeClr val="tx1"/>
+            </a:solidFill>
+          </a:ln>
+          <a:effectLst>
+            <a:outerShdw blurRad="50800" dist="38100" dir="2700000" algn="tl" rotWithShape="0">
+              <a:prstClr val="black">
+                <a:alpha val="40000"/>
+              </a:prstClr>
+            </a:outerShdw>
+          </a:effectLst>
+        </p:spPr>
+        <p:style>
+          <a:lnRef idx="2">
+            <a:schemeClr val="accent1">
+              <a:shade val="15000"/>
+            </a:schemeClr>
+          </a:lnRef>
+          <a:fillRef idx="1">
+            <a:schemeClr val="accent1"/>
+          </a:fillRef>
+          <a:effectRef idx="0">
+            <a:schemeClr val="accent1"/>
+          </a:effectRef>
+          <a:fontRef idx="minor">
+            <a:schemeClr val="lt1"/>
+          </a:fontRef>
+        </p:style>
+        <p:txBody>
+          <a:bodyPr rtlCol="0" anchor="ctr"/>
+          <a:lstStyle/>
+          <a:p>
+            <a:pPr algn="ctr"/>
+            <a:endParaRPr lang="en-GB"/>
+          </a:p>
+        </p:txBody>
+      </p:sp>
+      <p:pic>
+        <p:nvPicPr>
+          <p:cNvPr id="107" name="Picture 5">
+            <a:extLst>
+              <a:ext uri="{FF2B5EF4-FFF2-40B4-BE49-F238E27FC236}">
+                <a16:creationId xmlns:a16="http://schemas.microsoft.com/office/drawing/2014/main" id="{1A6E8CF9-13B9-DA47-0140-73AE1B174C7D}"/>
+              </a:ext>
+            </a:extLst>
+          </p:cNvPr>
+          <p:cNvPicPr>
+            <a:picLocks noChangeAspect="1" noChangeArrowheads="1"/>
+          </p:cNvPicPr>
+          <p:nvPr/>
+        </p:nvPicPr>
+        <p:blipFill>
+          <a:blip r:embed="rId14">
+            <a:extLst>
+              <a:ext uri="{28A0092B-C50C-407E-A947-70E740481C1C}">
+                <a14:useLocalDpi xmlns:a14="http://schemas.microsoft.com/office/drawing/2010/main" val="0"/>
+              </a:ext>
+            </a:extLst>
+          </a:blip>
+          <a:srcRect/>
+          <a:stretch>
+            <a:fillRect/>
+          </a:stretch>
+        </p:blipFill>
+        <p:spPr bwMode="auto">
+          <a:xfrm>
+            <a:off x="10267415" y="918232"/>
+            <a:ext cx="1744995" cy="1692918"/>
+          </a:xfrm>
+          <a:prstGeom prst="rect">
+            <a:avLst/>
+          </a:prstGeom>
+          <a:noFill/>
+          <a:extLst>
+            <a:ext uri="{909E8E84-426E-40DD-AFC4-6F175D3DCCD1}">
+              <a14:hiddenFill xmlns:a14="http://schemas.microsoft.com/office/drawing/2010/main">
+                <a:solidFill>
+                  <a:srgbClr val="BBE0E3"/>
+                </a:solidFill>
+              </a14:hiddenFill>
+            </a:ext>
+          </a:extLst>
+        </p:spPr>
+      </p:pic>
+      <p:sp>
+        <p:nvSpPr>
+          <p:cNvPr id="128" name="Rectangle: Rounded Corners 127">
+            <a:extLst>
+              <a:ext uri="{FF2B5EF4-FFF2-40B4-BE49-F238E27FC236}">
+                <a16:creationId xmlns:a16="http://schemas.microsoft.com/office/drawing/2014/main" id="{2BDFE8C3-DB65-409B-8E0C-0F1A30CA9A1A}"/>
+              </a:ext>
+            </a:extLst>
+          </p:cNvPr>
+          <p:cNvSpPr/>
+          <p:nvPr/>
+        </p:nvSpPr>
+        <p:spPr>
+          <a:xfrm>
+            <a:off x="10386436" y="1031470"/>
+            <a:ext cx="1581022" cy="1548137"/>
+          </a:xfrm>
+          <a:prstGeom prst="roundRect">
+            <a:avLst/>
+          </a:prstGeom>
+          <a:noFill/>
+          <a:ln w="28575">
+            <a:solidFill>
+              <a:srgbClr val="FF0000"/>
+            </a:solidFill>
+            <a:prstDash val="dash"/>
+          </a:ln>
+        </p:spPr>
+        <p:style>
+          <a:lnRef idx="2">
+            <a:schemeClr val="accent1">
+              <a:shade val="15000"/>
+            </a:schemeClr>
+          </a:lnRef>
+          <a:fillRef idx="1">
+            <a:schemeClr val="accent1"/>
+          </a:fillRef>
+          <a:effectRef idx="0">
+            <a:schemeClr val="accent1"/>
+          </a:effectRef>
+          <a:fontRef idx="minor">
+            <a:schemeClr val="lt1"/>
+          </a:fontRef>
+        </p:style>
+        <p:txBody>
+          <a:bodyPr rtlCol="0" anchor="ctr"/>
+          <a:lstStyle/>
+          <a:p>
+            <a:pPr algn="ctr"/>
+            <a:endParaRPr lang="en-US" sz="1913"/>
+          </a:p>
+        </p:txBody>
+      </p:sp>
+      <p:pic>
+        <p:nvPicPr>
+          <p:cNvPr id="90" name="Picture 89">
+            <a:extLst>
+              <a:ext uri="{FF2B5EF4-FFF2-40B4-BE49-F238E27FC236}">
+                <a16:creationId xmlns:a16="http://schemas.microsoft.com/office/drawing/2014/main" id="{65AB080A-5C70-1FBE-9D93-2652FE2359EC}"/>
+              </a:ext>
+            </a:extLst>
+          </p:cNvPr>
+          <p:cNvPicPr>
+            <a:picLocks noChangeAspect="1"/>
+          </p:cNvPicPr>
+          <p:nvPr/>
+        </p:nvPicPr>
+        <p:blipFill>
+          <a:blip r:embed="rId15" cstate="print">
+            <a:extLst>
+              <a:ext uri="{28A0092B-C50C-407E-A947-70E740481C1C}">
+                <a14:useLocalDpi xmlns:a14="http://schemas.microsoft.com/office/drawing/2010/main" val="0"/>
+              </a:ext>
+            </a:extLst>
+          </a:blip>
+          <a:srcRect/>
+          <a:stretch/>
+        </p:blipFill>
+        <p:spPr>
+          <a:xfrm rot="16200000">
+            <a:off x="9119640" y="1353391"/>
+            <a:ext cx="879856" cy="909464"/>
+          </a:xfrm>
+          <a:prstGeom prst="rect">
+            <a:avLst/>
+          </a:prstGeom>
+          <a:effectLst>
+            <a:softEdge rad="635000"/>
+          </a:effectLst>
+          <a:scene3d>
+            <a:camera prst="perspectiveRelaxed" fov="3900000">
+              <a:rot lat="19787143" lon="18897834" rev="3569538"/>
+            </a:camera>
+            <a:lightRig rig="flood" dir="t"/>
+          </a:scene3d>
+          <a:sp3d z="107950" extrusionH="133350" prstMaterial="matte">
+            <a:bevelT w="19050" h="38100"/>
+            <a:bevelB w="0" h="0"/>
+            <a:extrusionClr>
+              <a:schemeClr val="tx1">
+                <a:lumMod val="85000"/>
+                <a:lumOff val="15000"/>
+              </a:schemeClr>
+            </a:extrusionClr>
+          </a:sp3d>
+        </p:spPr>
+      </p:pic>
+      <p:pic>
+        <p:nvPicPr>
+          <p:cNvPr id="108" name="Picture 107">
+            <a:extLst>
+              <a:ext uri="{FF2B5EF4-FFF2-40B4-BE49-F238E27FC236}">
+                <a16:creationId xmlns:a16="http://schemas.microsoft.com/office/drawing/2014/main" id="{B1741D43-5C43-5684-1ED2-5EAA7FCD7635}"/>
+              </a:ext>
+            </a:extLst>
+          </p:cNvPr>
+          <p:cNvPicPr>
+            <a:picLocks noChangeAspect="1"/>
+          </p:cNvPicPr>
+          <p:nvPr/>
+        </p:nvPicPr>
+        <p:blipFill>
+          <a:blip r:embed="rId16">
+            <a:extLst>
+              <a:ext uri="{BEBA8EAE-BF5A-486C-A8C5-ECC9F3942E4B}">
+                <a14:imgProps xmlns:a14="http://schemas.microsoft.com/office/drawing/2010/main">
+                  <a14:imgLayer r:embed="rId17">
+                    <a14:imgEffect>
+                      <a14:backgroundRemoval t="10000" b="90000" l="10000" r="90000"/>
+                    </a14:imgEffect>
+                  </a14:imgLayer>
+                </a14:imgProps>
+              </a:ext>
+            </a:extLst>
+          </a:blip>
+          <a:stretch>
+            <a:fillRect/>
+          </a:stretch>
+        </p:blipFill>
+        <p:spPr>
+          <a:xfrm rot="16200000">
+            <a:off x="8638177" y="1580839"/>
+            <a:ext cx="801211" cy="440782"/>
+          </a:xfrm>
+          <a:prstGeom prst="rect">
+            <a:avLst/>
+          </a:prstGeom>
+        </p:spPr>
+      </p:pic>
+      <p:graphicFrame>
+        <p:nvGraphicFramePr>
+          <p:cNvPr id="126" name="Object 10">
+            <a:extLst>
+              <a:ext uri="{FF2B5EF4-FFF2-40B4-BE49-F238E27FC236}">
+                <a16:creationId xmlns:a16="http://schemas.microsoft.com/office/drawing/2014/main" id="{2119F2A6-50F5-6F3E-1C89-BFAB5ABEAF3E}"/>
+              </a:ext>
+            </a:extLst>
+          </p:cNvPr>
+          <p:cNvGraphicFramePr>
+            <a:graphicFrameLocks noChangeAspect="1"/>
+          </p:cNvGraphicFramePr>
+          <p:nvPr>
+            <p:extLst>
+              <p:ext uri="{D42A27DB-BD31-4B8C-83A1-F6EECF244321}">
+                <p14:modId xmlns:p14="http://schemas.microsoft.com/office/powerpoint/2010/main" val="1423188031"/>
+              </p:ext>
+            </p:extLst>
+          </p:nvPr>
+        </p:nvGraphicFramePr>
+        <p:xfrm>
+          <a:off x="12259804" y="1066431"/>
+          <a:ext cx="1642221" cy="1482988"/>
+        </p:xfrm>
+        <a:graphic>
+          <a:graphicData uri="http://schemas.openxmlformats.org/presentationml/2006/ole">
+            <mc:AlternateContent xmlns:mc="http://schemas.openxmlformats.org/markup-compatibility/2006">
+              <mc:Choice xmlns:v="urn:schemas-microsoft-com:vml" Requires="v">
+                <p:oleObj name="Picture" r:id="rId18" imgW="2173680" imgH="1965240" progId="Word.Picture.8">
+                  <p:embed/>
+                </p:oleObj>
+              </mc:Choice>
+              <mc:Fallback>
+                <p:oleObj name="Picture" r:id="rId18" imgW="2173680" imgH="1965240" progId="Word.Picture.8">
+                  <p:embed/>
+                  <p:pic>
+                    <p:nvPicPr>
+                      <p:cNvPr id="126" name="Object 10">
+                        <a:extLst>
+                          <a:ext uri="{FF2B5EF4-FFF2-40B4-BE49-F238E27FC236}">
+                            <a16:creationId xmlns:a16="http://schemas.microsoft.com/office/drawing/2014/main" id="{2EED7886-C6E9-22A8-9AFB-23089CB0D429}"/>
+                          </a:ext>
+                        </a:extLst>
+                      </p:cNvPr>
+                      <p:cNvPicPr>
+                        <a:picLocks noChangeAspect="1" noChangeArrowheads="1"/>
+                      </p:cNvPicPr>
+                      <p:nvPr/>
+                    </p:nvPicPr>
+                    <p:blipFill>
+                      <a:blip r:embed="rId19"/>
+                      <a:srcRect/>
+                      <a:stretch>
+                        <a:fillRect/>
+                      </a:stretch>
+                    </p:blipFill>
+                    <p:spPr bwMode="auto">
+                      <a:xfrm>
+                        <a:off x="12259804" y="1066431"/>
+                        <a:ext cx="1642221" cy="1482988"/>
+                      </a:xfrm>
+                      <a:prstGeom prst="rect">
+                        <a:avLst/>
+                      </a:prstGeom>
+                      <a:noFill/>
+                      <a:ln>
+                        <a:noFill/>
+                      </a:ln>
+                    </p:spPr>
+                  </p:pic>
+                </p:oleObj>
+              </mc:Fallback>
+            </mc:AlternateContent>
+          </a:graphicData>
+        </a:graphic>
+      </p:graphicFrame>
+      <p:cxnSp>
+        <p:nvCxnSpPr>
+          <p:cNvPr id="130" name="Straight Connector 129">
+            <a:extLst>
+              <a:ext uri="{FF2B5EF4-FFF2-40B4-BE49-F238E27FC236}">
+                <a16:creationId xmlns:a16="http://schemas.microsoft.com/office/drawing/2014/main" id="{692C5EB2-B956-87C1-1696-C1A4DFCD7203}"/>
+              </a:ext>
+            </a:extLst>
+          </p:cNvPr>
+          <p:cNvCxnSpPr>
+            <a:cxnSpLocks/>
+          </p:cNvCxnSpPr>
+          <p:nvPr/>
+        </p:nvCxnSpPr>
+        <p:spPr>
+          <a:xfrm flipH="1">
+            <a:off x="11639069" y="1066431"/>
+            <a:ext cx="694970" cy="546064"/>
+          </a:xfrm>
+          <a:prstGeom prst="line">
+            <a:avLst/>
+          </a:prstGeom>
+        </p:spPr>
+        <p:style>
+          <a:lnRef idx="2">
+            <a:schemeClr val="dk1"/>
+          </a:lnRef>
+          <a:fillRef idx="0">
+            <a:schemeClr val="dk1"/>
+          </a:fillRef>
+          <a:effectRef idx="1">
+            <a:schemeClr val="dk1"/>
+          </a:effectRef>
+          <a:fontRef idx="minor">
+            <a:schemeClr val="tx1"/>
+          </a:fontRef>
+        </p:style>
+      </p:cxnSp>
+      <p:cxnSp>
+        <p:nvCxnSpPr>
+          <p:cNvPr id="133" name="Straight Connector 132">
+            <a:extLst>
+              <a:ext uri="{FF2B5EF4-FFF2-40B4-BE49-F238E27FC236}">
+                <a16:creationId xmlns:a16="http://schemas.microsoft.com/office/drawing/2014/main" id="{E0ADC21E-F949-422C-D091-39343B86B90E}"/>
+              </a:ext>
+            </a:extLst>
+          </p:cNvPr>
+          <p:cNvCxnSpPr>
+            <a:cxnSpLocks/>
+          </p:cNvCxnSpPr>
+          <p:nvPr/>
+        </p:nvCxnSpPr>
+        <p:spPr>
+          <a:xfrm>
+            <a:off x="11639069" y="1742670"/>
+            <a:ext cx="694970" cy="789709"/>
+          </a:xfrm>
+          <a:prstGeom prst="line">
+            <a:avLst/>
+          </a:prstGeom>
+        </p:spPr>
+        <p:style>
+          <a:lnRef idx="2">
+            <a:schemeClr val="dk1"/>
+          </a:lnRef>
+          <a:fillRef idx="0">
+            <a:schemeClr val="dk1"/>
+          </a:fillRef>
+          <a:effectRef idx="1">
+            <a:schemeClr val="dk1"/>
+          </a:effectRef>
+          <a:fontRef idx="minor">
+            <a:schemeClr val="tx1"/>
+          </a:fontRef>
+        </p:style>
+      </p:cxnSp>
+      <p:cxnSp>
+        <p:nvCxnSpPr>
+          <p:cNvPr id="6" name="Straight Arrow Connector 5">
+            <a:extLst>
+              <a:ext uri="{FF2B5EF4-FFF2-40B4-BE49-F238E27FC236}">
+                <a16:creationId xmlns:a16="http://schemas.microsoft.com/office/drawing/2014/main" id="{0C079972-1127-A215-A601-748A8C73ABBC}"/>
+              </a:ext>
+            </a:extLst>
+          </p:cNvPr>
+          <p:cNvCxnSpPr>
+            <a:cxnSpLocks/>
+          </p:cNvCxnSpPr>
+          <p:nvPr/>
+        </p:nvCxnSpPr>
+        <p:spPr>
+          <a:xfrm flipV="1">
+            <a:off x="9712108" y="1453745"/>
+            <a:ext cx="655590" cy="342900"/>
+          </a:xfrm>
+          <a:prstGeom prst="straightConnector1">
+            <a:avLst/>
+          </a:prstGeom>
+          <a:ln w="38100">
+            <a:solidFill>
+              <a:srgbClr val="FF0000"/>
+            </a:solidFill>
+            <a:tailEnd type="triangle"/>
+          </a:ln>
+        </p:spPr>
+        <p:style>
+          <a:lnRef idx="2">
+            <a:schemeClr val="accent1"/>
+          </a:lnRef>
+          <a:fillRef idx="0">
+            <a:schemeClr val="accent1"/>
+          </a:fillRef>
+          <a:effectRef idx="1">
+            <a:schemeClr val="accent1"/>
+          </a:effectRef>
+          <a:fontRef idx="minor">
+            <a:schemeClr val="tx1"/>
+          </a:fontRef>
+        </p:style>
+      </p:cxnSp>
+      <p:sp>
+        <p:nvSpPr>
+          <p:cNvPr id="48" name="Arrow: Right 47">
+            <a:extLst>
+              <a:ext uri="{FF2B5EF4-FFF2-40B4-BE49-F238E27FC236}">
+                <a16:creationId xmlns:a16="http://schemas.microsoft.com/office/drawing/2014/main" id="{FE537A77-A1FF-07EA-3BDE-315FB22C0009}"/>
+              </a:ext>
+            </a:extLst>
+          </p:cNvPr>
+          <p:cNvSpPr/>
+          <p:nvPr/>
+        </p:nvSpPr>
+        <p:spPr>
+          <a:xfrm>
+            <a:off x="7939792" y="1572074"/>
+            <a:ext cx="909465" cy="385233"/>
+          </a:xfrm>
+          <a:prstGeom prst="rightArrow">
+            <a:avLst/>
+          </a:prstGeom>
+          <a:solidFill>
+            <a:srgbClr val="B5D197"/>
+          </a:solidFill>
+        </p:spPr>
+        <p:style>
+          <a:lnRef idx="2">
+            <a:schemeClr val="accent6">
+              <a:shade val="15000"/>
+            </a:schemeClr>
+          </a:lnRef>
+          <a:fillRef idx="1">
+            <a:schemeClr val="accent6"/>
+          </a:fillRef>
+          <a:effectRef idx="0">
+            <a:schemeClr val="accent6"/>
+          </a:effectRef>
+          <a:fontRef idx="minor">
+            <a:schemeClr val="lt1"/>
+          </a:fontRef>
+        </p:style>
+        <p:txBody>
+          <a:bodyPr rtlCol="0" anchor="ctr"/>
+          <a:lstStyle/>
+          <a:p>
+            <a:pPr algn="ctr"/>
+            <a:endParaRPr lang="en-GB"/>
+          </a:p>
+        </p:txBody>
+      </p:sp>
+      <p:sp>
+        <p:nvSpPr>
+          <p:cNvPr id="51" name="Rectangle 50">
+            <a:extLst>
+              <a:ext uri="{FF2B5EF4-FFF2-40B4-BE49-F238E27FC236}">
+                <a16:creationId xmlns:a16="http://schemas.microsoft.com/office/drawing/2014/main" id="{ABDE368B-6A06-5DCA-12BA-E551BFE3829D}"/>
+              </a:ext>
+            </a:extLst>
+          </p:cNvPr>
+          <p:cNvSpPr/>
+          <p:nvPr/>
+        </p:nvSpPr>
+        <p:spPr>
+          <a:xfrm rot="16200000">
+            <a:off x="9763880" y="1811212"/>
+            <a:ext cx="962426" cy="186821"/>
+          </a:xfrm>
+          <a:prstGeom prst="rect">
+            <a:avLst/>
+          </a:prstGeom>
+          <a:solidFill>
+            <a:srgbClr val="B5D197"/>
+          </a:solidFill>
+        </p:spPr>
+        <p:style>
+          <a:lnRef idx="2">
+            <a:schemeClr val="accent6">
+              <a:shade val="15000"/>
+            </a:schemeClr>
+          </a:lnRef>
+          <a:fillRef idx="1">
+            <a:schemeClr val="accent6"/>
+          </a:fillRef>
+          <a:effectRef idx="0">
+            <a:schemeClr val="accent6"/>
+          </a:effectRef>
+          <a:fontRef idx="minor">
+            <a:schemeClr val="lt1"/>
+          </a:fontRef>
+        </p:style>
+        <p:txBody>
+          <a:bodyPr rtlCol="0" anchor="ctr"/>
+          <a:lstStyle/>
+          <a:p>
+            <a:pPr algn="ctr"/>
+            <a:endParaRPr lang="en-GB"/>
+          </a:p>
+        </p:txBody>
+      </p:sp>
+      <p:sp>
+        <p:nvSpPr>
+          <p:cNvPr id="13" name="Rectangle 12">
+            <a:extLst>
+              <a:ext uri="{FF2B5EF4-FFF2-40B4-BE49-F238E27FC236}">
+                <a16:creationId xmlns:a16="http://schemas.microsoft.com/office/drawing/2014/main" id="{61F2417C-0CC1-C870-D735-8CE7D10AA339}"/>
+              </a:ext>
+            </a:extLst>
+          </p:cNvPr>
+          <p:cNvSpPr/>
+          <p:nvPr/>
+        </p:nvSpPr>
+        <p:spPr>
+          <a:xfrm>
+            <a:off x="7939620" y="1864864"/>
+            <a:ext cx="267653" cy="815964"/>
+          </a:xfrm>
+          <a:prstGeom prst="rect">
+            <a:avLst/>
+          </a:prstGeom>
+          <a:solidFill>
+            <a:srgbClr val="B5D197"/>
+          </a:solidFill>
+          <a:ln>
+            <a:solidFill>
+              <a:srgbClr val="1C440D"/>
+            </a:solidFill>
+          </a:ln>
+        </p:spPr>
+        <p:style>
+          <a:lnRef idx="2">
+            <a:schemeClr val="accent1">
+              <a:shade val="15000"/>
+            </a:schemeClr>
+          </a:lnRef>
+          <a:fillRef idx="1">
+            <a:schemeClr val="accent1"/>
+          </a:fillRef>
+          <a:effectRef idx="0">
+            <a:schemeClr val="accent1"/>
+          </a:effectRef>
+          <a:fontRef idx="minor">
+            <a:schemeClr val="lt1"/>
+          </a:fontRef>
+        </p:style>
+        <p:txBody>
+          <a:bodyPr rtlCol="0" anchor="ctr"/>
+          <a:lstStyle/>
+          <a:p>
+            <a:pPr algn="ctr"/>
+            <a:endParaRPr lang="en-US"/>
+          </a:p>
+        </p:txBody>
+      </p:sp>
+      <p:sp>
+        <p:nvSpPr>
+          <p:cNvPr id="14" name="Rectangle 13">
+            <a:extLst>
+              <a:ext uri="{FF2B5EF4-FFF2-40B4-BE49-F238E27FC236}">
+                <a16:creationId xmlns:a16="http://schemas.microsoft.com/office/drawing/2014/main" id="{D49DF480-2242-ECFE-66C4-F42F6491B501}"/>
+              </a:ext>
+            </a:extLst>
+          </p:cNvPr>
+          <p:cNvSpPr/>
+          <p:nvPr/>
+        </p:nvSpPr>
+        <p:spPr>
+          <a:xfrm>
+            <a:off x="7958840" y="1784759"/>
+            <a:ext cx="233549" cy="957985"/>
+          </a:xfrm>
+          <a:prstGeom prst="rect">
+            <a:avLst/>
+          </a:prstGeom>
+          <a:solidFill>
+            <a:srgbClr val="B5D197"/>
+          </a:solidFill>
+          <a:ln>
+            <a:solidFill>
+              <a:srgbClr val="B5D197"/>
+            </a:solidFill>
+          </a:ln>
+        </p:spPr>
+        <p:style>
+          <a:lnRef idx="2">
+            <a:schemeClr val="accent1">
+              <a:shade val="15000"/>
+            </a:schemeClr>
+          </a:lnRef>
+          <a:fillRef idx="1">
+            <a:schemeClr val="accent1"/>
+          </a:fillRef>
+          <a:effectRef idx="0">
+            <a:schemeClr val="accent1"/>
+          </a:effectRef>
+          <a:fontRef idx="minor">
+            <a:schemeClr val="lt1"/>
+          </a:fontRef>
+        </p:style>
+        <p:txBody>
+          <a:bodyPr rtlCol="0" anchor="ctr"/>
+          <a:lstStyle/>
+          <a:p>
+            <a:pPr algn="ctr"/>
+            <a:endParaRPr lang="en-US"/>
+          </a:p>
+        </p:txBody>
+      </p:sp>
+      <p:cxnSp>
+        <p:nvCxnSpPr>
+          <p:cNvPr id="20" name="Straight Arrow Connector 19">
+            <a:extLst>
+              <a:ext uri="{FF2B5EF4-FFF2-40B4-BE49-F238E27FC236}">
+                <a16:creationId xmlns:a16="http://schemas.microsoft.com/office/drawing/2014/main" id="{031894F2-F3B4-4EBB-810F-C9F691530815}"/>
+              </a:ext>
+            </a:extLst>
+          </p:cNvPr>
+          <p:cNvCxnSpPr>
+            <a:stCxn id="49" idx="3"/>
+          </p:cNvCxnSpPr>
+          <p:nvPr/>
+        </p:nvCxnSpPr>
+        <p:spPr>
+          <a:xfrm>
+            <a:off x="11545097" y="4064323"/>
+            <a:ext cx="785306" cy="1942"/>
+          </a:xfrm>
+          <a:prstGeom prst="straightConnector1">
+            <a:avLst/>
+          </a:prstGeom>
+          <a:ln w="76200">
+            <a:solidFill>
+              <a:schemeClr val="tx1"/>
+            </a:solidFill>
+            <a:tailEnd type="triangle"/>
+          </a:ln>
+        </p:spPr>
+        <p:style>
+          <a:lnRef idx="2">
+            <a:schemeClr val="accent1"/>
+          </a:lnRef>
+          <a:fillRef idx="0">
+            <a:schemeClr val="accent1"/>
+          </a:fillRef>
+          <a:effectRef idx="1">
+            <a:schemeClr val="accent1"/>
+          </a:effectRef>
+          <a:fontRef idx="minor">
+            <a:schemeClr val="tx1"/>
+          </a:fontRef>
+        </p:style>
+      </p:cxnSp>
+      <p:cxnSp>
+        <p:nvCxnSpPr>
+          <p:cNvPr id="22" name="Straight Arrow Connector 21">
+            <a:extLst>
+              <a:ext uri="{FF2B5EF4-FFF2-40B4-BE49-F238E27FC236}">
+                <a16:creationId xmlns:a16="http://schemas.microsoft.com/office/drawing/2014/main" id="{1E9C5342-708A-8A28-C527-C60E05A48548}"/>
+              </a:ext>
+            </a:extLst>
+          </p:cNvPr>
+          <p:cNvCxnSpPr/>
+          <p:nvPr/>
+        </p:nvCxnSpPr>
+        <p:spPr>
+          <a:xfrm>
+            <a:off x="11530240" y="6978973"/>
+            <a:ext cx="785306" cy="1942"/>
+          </a:xfrm>
+          <a:prstGeom prst="straightConnector1">
+            <a:avLst/>
+          </a:prstGeom>
+          <a:ln w="76200">
+            <a:solidFill>
+              <a:schemeClr val="tx1"/>
+            </a:solidFill>
+            <a:tailEnd type="triangle"/>
+          </a:ln>
+        </p:spPr>
+        <p:style>
+          <a:lnRef idx="2">
+            <a:schemeClr val="accent1"/>
+          </a:lnRef>
+          <a:fillRef idx="0">
+            <a:schemeClr val="accent1"/>
+          </a:fillRef>
+          <a:effectRef idx="1">
+            <a:schemeClr val="accent1"/>
+          </a:effectRef>
+          <a:fontRef idx="minor">
+            <a:schemeClr val="tx1"/>
+          </a:fontRef>
+        </p:style>
+      </p:cxnSp>
+    </p:spTree>
+    <p:extLst>
+      <p:ext uri="{BB962C8B-B14F-4D97-AF65-F5344CB8AC3E}">
+        <p14:creationId xmlns:p14="http://schemas.microsoft.com/office/powerpoint/2010/main" val="421017662"/>
+      </p:ext>
+    </p:extLst>
+  </p:cSld>
+  <p:clrMapOvr>
+    <a:masterClrMapping/>
+  </p:clrMapOvr>
+</p:sld>
+</file>
+
+<file path=ppt/slides/slide5.xml><?xml version="1.0" encoding="utf-8"?>
+<p:sld xmlns:a="http://schemas.openxmlformats.org/drawingml/2006/main" xmlns:r="http://schemas.openxmlformats.org/officeDocument/2006/relationships" xmlns:p="http://schemas.openxmlformats.org/presentationml/2006/main">
+  <p:cSld>
+    <p:spTree>
+      <p:nvGrpSpPr>
+        <p:cNvPr id="1" name="">
+          <a:extLst>
+            <a:ext uri="{FF2B5EF4-FFF2-40B4-BE49-F238E27FC236}">
               <a16:creationId xmlns:a16="http://schemas.microsoft.com/office/drawing/2014/main" id="{AB28F1CB-18AE-9CEF-620D-3BE25C7287AD}"/>
             </a:ext>
           </a:extLst>
@@ -14123,8 +16732,8 @@
           </a:p>
         </p:txBody>
       </p:sp>
-      <mc:AlternateContent xmlns:mc="http://schemas.openxmlformats.org/markup-compatibility/2006">
-        <mc:Choice xmlns:a14="http://schemas.microsoft.com/office/drawing/2010/main" Requires="a14">
+      <mc:AlternateContent xmlns:mc="http://schemas.openxmlformats.org/markup-compatibility/2006" xmlns:a14="http://schemas.microsoft.com/office/drawing/2010/main">
+        <mc:Choice Requires="a14">
           <p:sp>
             <p:nvSpPr>
               <p:cNvPr id="3" name="Rectangle: Rounded Corners 2">
@@ -14210,7 +16819,7 @@
             </p:txBody>
           </p:sp>
         </mc:Choice>
-        <mc:Fallback>
+        <mc:Fallback xmlns="">
           <p:sp>
             <p:nvSpPr>
               <p:cNvPr id="3" name="Rectangle: Rounded Corners 2">
@@ -14255,8 +16864,8 @@
           </p:sp>
         </mc:Fallback>
       </mc:AlternateContent>
-      <mc:AlternateContent xmlns:mc="http://schemas.openxmlformats.org/markup-compatibility/2006">
-        <mc:Choice xmlns:a14="http://schemas.microsoft.com/office/drawing/2010/main" Requires="a14">
+      <mc:AlternateContent xmlns:mc="http://schemas.openxmlformats.org/markup-compatibility/2006" xmlns:a14="http://schemas.microsoft.com/office/drawing/2010/main">
+        <mc:Choice Requires="a14">
           <p:sp>
             <p:nvSpPr>
               <p:cNvPr id="4" name="Rectangle: Rounded Corners 3">
@@ -14350,7 +16959,7 @@
             </p:txBody>
           </p:sp>
         </mc:Choice>
-        <mc:Fallback>
+        <mc:Fallback xmlns="">
           <p:sp>
             <p:nvSpPr>
               <p:cNvPr id="4" name="Rectangle: Rounded Corners 3">
@@ -14395,8 +17004,8 @@
           </p:sp>
         </mc:Fallback>
       </mc:AlternateContent>
-      <mc:AlternateContent xmlns:mc="http://schemas.openxmlformats.org/markup-compatibility/2006">
-        <mc:Choice xmlns:a14="http://schemas.microsoft.com/office/drawing/2010/main" Requires="a14">
+      <mc:AlternateContent xmlns:mc="http://schemas.openxmlformats.org/markup-compatibility/2006" xmlns:a14="http://schemas.microsoft.com/office/drawing/2010/main">
+        <mc:Choice Requires="a14">
           <p:sp>
             <p:nvSpPr>
               <p:cNvPr id="5" name="Rectangle: Rounded Corners 4">
@@ -14481,7 +17090,7 @@
             </p:txBody>
           </p:sp>
         </mc:Choice>
-        <mc:Fallback>
+        <mc:Fallback xmlns="">
           <p:sp>
             <p:nvSpPr>
               <p:cNvPr id="5" name="Rectangle: Rounded Corners 4">
@@ -14526,8 +17135,8 @@
           </p:sp>
         </mc:Fallback>
       </mc:AlternateContent>
-      <mc:AlternateContent xmlns:mc="http://schemas.openxmlformats.org/markup-compatibility/2006">
-        <mc:Choice xmlns:a14="http://schemas.microsoft.com/office/drawing/2010/main" Requires="a14">
+      <mc:AlternateContent xmlns:mc="http://schemas.openxmlformats.org/markup-compatibility/2006" xmlns:a14="http://schemas.microsoft.com/office/drawing/2010/main">
+        <mc:Choice Requires="a14">
           <p:sp>
             <p:nvSpPr>
               <p:cNvPr id="6" name="Rectangle: Rounded Corners 5">
@@ -14612,7 +17221,7 @@
             </p:txBody>
           </p:sp>
         </mc:Choice>
-        <mc:Fallback>
+        <mc:Fallback xmlns="">
           <p:sp>
             <p:nvSpPr>
               <p:cNvPr id="6" name="Rectangle: Rounded Corners 5">
@@ -14657,8 +17266,8 @@
           </p:sp>
         </mc:Fallback>
       </mc:AlternateContent>
-      <mc:AlternateContent xmlns:mc="http://schemas.openxmlformats.org/markup-compatibility/2006">
-        <mc:Choice xmlns:a14="http://schemas.microsoft.com/office/drawing/2010/main" Requires="a14">
+      <mc:AlternateContent xmlns:mc="http://schemas.openxmlformats.org/markup-compatibility/2006" xmlns:a14="http://schemas.microsoft.com/office/drawing/2010/main">
+        <mc:Choice Requires="a14">
           <p:sp>
             <p:nvSpPr>
               <p:cNvPr id="7" name="Rectangle: Rounded Corners 6">
@@ -14752,7 +17361,7 @@
             </p:txBody>
           </p:sp>
         </mc:Choice>
-        <mc:Fallback>
+        <mc:Fallback xmlns="">
           <p:sp>
             <p:nvSpPr>
               <p:cNvPr id="7" name="Rectangle: Rounded Corners 6">
@@ -14797,8 +17406,8 @@
           </p:sp>
         </mc:Fallback>
       </mc:AlternateContent>
-      <mc:AlternateContent xmlns:mc="http://schemas.openxmlformats.org/markup-compatibility/2006">
-        <mc:Choice xmlns:a14="http://schemas.microsoft.com/office/drawing/2010/main" Requires="a14">
+      <mc:AlternateContent xmlns:mc="http://schemas.openxmlformats.org/markup-compatibility/2006" xmlns:a14="http://schemas.microsoft.com/office/drawing/2010/main">
+        <mc:Choice Requires="a14">
           <p:sp>
             <p:nvSpPr>
               <p:cNvPr id="8" name="Rectangle: Rounded Corners 7">
@@ -14959,7 +17568,7 @@
             </p:txBody>
           </p:sp>
         </mc:Choice>
-        <mc:Fallback>
+        <mc:Fallback xmlns="">
           <p:sp>
             <p:nvSpPr>
               <p:cNvPr id="8" name="Rectangle: Rounded Corners 7">
@@ -15187,8 +17796,8 @@
           </a:fontRef>
         </p:style>
       </p:cxnSp>
-      <mc:AlternateContent xmlns:mc="http://schemas.openxmlformats.org/markup-compatibility/2006">
-        <mc:Choice xmlns:a14="http://schemas.microsoft.com/office/drawing/2010/main" Requires="a14">
+      <mc:AlternateContent xmlns:mc="http://schemas.openxmlformats.org/markup-compatibility/2006" xmlns:a14="http://schemas.microsoft.com/office/drawing/2010/main">
+        <mc:Choice Requires="a14">
           <p:sp>
             <p:nvSpPr>
               <p:cNvPr id="26" name="Rectangle: Rounded Corners 25">
@@ -15268,7 +17877,7 @@
             </p:txBody>
           </p:sp>
         </mc:Choice>
-        <mc:Fallback>
+        <mc:Fallback xmlns="">
           <p:sp>
             <p:nvSpPr>
               <p:cNvPr id="26" name="Rectangle: Rounded Corners 25">
@@ -15313,8 +17922,8 @@
           </p:sp>
         </mc:Fallback>
       </mc:AlternateContent>
-      <mc:AlternateContent xmlns:mc="http://schemas.openxmlformats.org/markup-compatibility/2006">
-        <mc:Choice xmlns:a14="http://schemas.microsoft.com/office/drawing/2010/main" Requires="a14">
+      <mc:AlternateContent xmlns:mc="http://schemas.openxmlformats.org/markup-compatibility/2006" xmlns:a14="http://schemas.microsoft.com/office/drawing/2010/main">
+        <mc:Choice Requires="a14">
           <p:sp>
             <p:nvSpPr>
               <p:cNvPr id="27" name="Rectangle: Rounded Corners 26">
@@ -15381,7 +17990,7 @@
             </p:txBody>
           </p:sp>
         </mc:Choice>
-        <mc:Fallback>
+        <mc:Fallback xmlns="">
           <p:sp>
             <p:nvSpPr>
               <p:cNvPr id="27" name="Rectangle: Rounded Corners 26">
@@ -15426,8 +18035,8 @@
           </p:sp>
         </mc:Fallback>
       </mc:AlternateContent>
-      <mc:AlternateContent xmlns:mc="http://schemas.openxmlformats.org/markup-compatibility/2006">
-        <mc:Choice xmlns:a14="http://schemas.microsoft.com/office/drawing/2010/main" Requires="a14">
+      <mc:AlternateContent xmlns:mc="http://schemas.openxmlformats.org/markup-compatibility/2006" xmlns:a14="http://schemas.microsoft.com/office/drawing/2010/main">
+        <mc:Choice Requires="a14">
           <p:sp>
             <p:nvSpPr>
               <p:cNvPr id="28" name="Rectangle: Rounded Corners 27">
@@ -15521,7 +18130,7 @@
             </p:txBody>
           </p:sp>
         </mc:Choice>
-        <mc:Fallback>
+        <mc:Fallback xmlns="">
           <p:sp>
             <p:nvSpPr>
               <p:cNvPr id="28" name="Rectangle: Rounded Corners 27">
@@ -15566,8 +18175,8 @@
           </p:sp>
         </mc:Fallback>
       </mc:AlternateContent>
-      <mc:AlternateContent xmlns:mc="http://schemas.openxmlformats.org/markup-compatibility/2006">
-        <mc:Choice xmlns:a14="http://schemas.microsoft.com/office/drawing/2010/main" Requires="a14">
+      <mc:AlternateContent xmlns:mc="http://schemas.openxmlformats.org/markup-compatibility/2006" xmlns:a14="http://schemas.microsoft.com/office/drawing/2010/main">
+        <mc:Choice Requires="a14">
           <p:sp>
             <p:nvSpPr>
               <p:cNvPr id="29" name="Rectangle: Rounded Corners 28">
@@ -15653,7 +18262,7 @@
             </p:txBody>
           </p:sp>
         </mc:Choice>
-        <mc:Fallback>
+        <mc:Fallback xmlns="">
           <p:sp>
             <p:nvSpPr>
               <p:cNvPr id="29" name="Rectangle: Rounded Corners 28">
@@ -15698,8 +18307,8 @@
           </p:sp>
         </mc:Fallback>
       </mc:AlternateContent>
-      <mc:AlternateContent xmlns:mc="http://schemas.openxmlformats.org/markup-compatibility/2006">
-        <mc:Choice xmlns:a14="http://schemas.microsoft.com/office/drawing/2010/main" Requires="a14">
+      <mc:AlternateContent xmlns:mc="http://schemas.openxmlformats.org/markup-compatibility/2006" xmlns:a14="http://schemas.microsoft.com/office/drawing/2010/main">
+        <mc:Choice Requires="a14">
           <p:sp>
             <p:nvSpPr>
               <p:cNvPr id="30" name="Rectangle: Rounded Corners 29">
@@ -15892,7 +18501,7 @@
             </p:txBody>
           </p:sp>
         </mc:Choice>
-        <mc:Fallback>
+        <mc:Fallback xmlns="">
           <p:sp>
             <p:nvSpPr>
               <p:cNvPr id="30" name="Rectangle: Rounded Corners 29">
@@ -16259,8 +18868,8 @@
           </a:fontRef>
         </p:style>
       </p:cxnSp>
-      <mc:AlternateContent xmlns:mc="http://schemas.openxmlformats.org/markup-compatibility/2006">
-        <mc:Choice xmlns:a14="http://schemas.microsoft.com/office/drawing/2010/main" Requires="a14">
+      <mc:AlternateContent xmlns:mc="http://schemas.openxmlformats.org/markup-compatibility/2006" xmlns:a14="http://schemas.microsoft.com/office/drawing/2010/main">
+        <mc:Choice Requires="a14">
           <p:sp>
             <p:nvSpPr>
               <p:cNvPr id="80" name="Rectangle: Rounded Corners 79">
@@ -16345,7 +18954,7 @@
             </p:txBody>
           </p:sp>
         </mc:Choice>
-        <mc:Fallback>
+        <mc:Fallback xmlns="">
           <p:sp>
             <p:nvSpPr>
               <p:cNvPr id="80" name="Rectangle: Rounded Corners 79">
@@ -16390,8 +18999,8 @@
           </p:sp>
         </mc:Fallback>
       </mc:AlternateContent>
-      <mc:AlternateContent xmlns:mc="http://schemas.openxmlformats.org/markup-compatibility/2006">
-        <mc:Choice xmlns:a14="http://schemas.microsoft.com/office/drawing/2010/main" Requires="a14">
+      <mc:AlternateContent xmlns:mc="http://schemas.openxmlformats.org/markup-compatibility/2006" xmlns:a14="http://schemas.microsoft.com/office/drawing/2010/main">
+        <mc:Choice Requires="a14">
           <p:sp>
             <p:nvSpPr>
               <p:cNvPr id="81" name="Rectangle: Rounded Corners 80">
@@ -16461,7 +19070,7 @@
             </p:txBody>
           </p:sp>
         </mc:Choice>
-        <mc:Fallback>
+        <mc:Fallback xmlns="">
           <p:sp>
             <p:nvSpPr>
               <p:cNvPr id="81" name="Rectangle: Rounded Corners 80">
@@ -16702,8 +19311,8 @@
           </a:p>
         </p:txBody>
       </p:sp>
-      <mc:AlternateContent xmlns:mc="http://schemas.openxmlformats.org/markup-compatibility/2006">
-        <mc:Choice xmlns:a14="http://schemas.microsoft.com/office/drawing/2010/main" Requires="a14">
+      <mc:AlternateContent xmlns:mc="http://schemas.openxmlformats.org/markup-compatibility/2006" xmlns:a14="http://schemas.microsoft.com/office/drawing/2010/main">
+        <mc:Choice Requires="a14">
           <p:sp>
             <p:nvSpPr>
               <p:cNvPr id="91" name="TextBox 90">
@@ -16772,7 +19381,7 @@
             </p:txBody>
           </p:sp>
         </mc:Choice>
-        <mc:Fallback>
+        <mc:Fallback xmlns="">
           <p:sp>
             <p:nvSpPr>
               <p:cNvPr id="91" name="TextBox 90">
@@ -16817,8 +19426,8 @@
           </p:sp>
         </mc:Fallback>
       </mc:AlternateContent>
-      <mc:AlternateContent xmlns:mc="http://schemas.openxmlformats.org/markup-compatibility/2006">
-        <mc:Choice xmlns:a14="http://schemas.microsoft.com/office/drawing/2010/main" Requires="a14">
+      <mc:AlternateContent xmlns:mc="http://schemas.openxmlformats.org/markup-compatibility/2006" xmlns:a14="http://schemas.microsoft.com/office/drawing/2010/main">
+        <mc:Choice Requires="a14">
           <p:sp>
             <p:nvSpPr>
               <p:cNvPr id="92" name="TextBox 91">
@@ -16887,7 +19496,7 @@
             </p:txBody>
           </p:sp>
         </mc:Choice>
-        <mc:Fallback>
+        <mc:Fallback xmlns="">
           <p:sp>
             <p:nvSpPr>
               <p:cNvPr id="92" name="TextBox 91">
@@ -17417,8 +20026,8 @@
           </a:fontRef>
         </p:style>
       </p:cxnSp>
-      <mc:AlternateContent xmlns:mc="http://schemas.openxmlformats.org/markup-compatibility/2006">
-        <mc:Choice xmlns:a14="http://schemas.microsoft.com/office/drawing/2010/main" Requires="a14">
+      <mc:AlternateContent xmlns:mc="http://schemas.openxmlformats.org/markup-compatibility/2006" xmlns:a14="http://schemas.microsoft.com/office/drawing/2010/main">
+        <mc:Choice Requires="a14">
           <p:sp>
             <p:nvSpPr>
               <p:cNvPr id="113" name="TextBox 112">
@@ -17487,7 +20096,7 @@
             </p:txBody>
           </p:sp>
         </mc:Choice>
-        <mc:Fallback>
+        <mc:Fallback xmlns="">
           <p:sp>
             <p:nvSpPr>
               <p:cNvPr id="113" name="TextBox 112">
@@ -17532,8 +20141,8 @@
           </p:sp>
         </mc:Fallback>
       </mc:AlternateContent>
-      <mc:AlternateContent xmlns:mc="http://schemas.openxmlformats.org/markup-compatibility/2006">
-        <mc:Choice xmlns:a14="http://schemas.microsoft.com/office/drawing/2010/main" Requires="a14">
+      <mc:AlternateContent xmlns:mc="http://schemas.openxmlformats.org/markup-compatibility/2006" xmlns:a14="http://schemas.microsoft.com/office/drawing/2010/main">
+        <mc:Choice Requires="a14">
           <p:sp>
             <p:nvSpPr>
               <p:cNvPr id="114" name="TextBox 113">
@@ -17602,7 +20211,7 @@
             </p:txBody>
           </p:sp>
         </mc:Choice>
-        <mc:Fallback>
+        <mc:Fallback xmlns="">
           <p:sp>
             <p:nvSpPr>
               <p:cNvPr id="114" name="TextBox 113">
@@ -17647,8 +20256,8 @@
           </p:sp>
         </mc:Fallback>
       </mc:AlternateContent>
-      <mc:AlternateContent xmlns:mc="http://schemas.openxmlformats.org/markup-compatibility/2006">
-        <mc:Choice xmlns:a14="http://schemas.microsoft.com/office/drawing/2010/main" Requires="a14">
+      <mc:AlternateContent xmlns:mc="http://schemas.openxmlformats.org/markup-compatibility/2006" xmlns:a14="http://schemas.microsoft.com/office/drawing/2010/main">
+        <mc:Choice Requires="a14">
           <p:sp>
             <p:nvSpPr>
               <p:cNvPr id="117" name="TextBox 116">
@@ -17717,7 +20326,7 @@
             </p:txBody>
           </p:sp>
         </mc:Choice>
-        <mc:Fallback>
+        <mc:Fallback xmlns="">
           <p:sp>
             <p:nvSpPr>
               <p:cNvPr id="117" name="TextBox 116">
